--- a/docs/pptx/entire/ritu-entire-linsubhr-ratio-hosp6.pptx
+++ b/docs/pptx/entire/ritu-entire-linsubhr-ratio-hosp6.pptx
@@ -2960,566 +2960,566 @@
           <p:spPr>
             <a:xfrm>
               <a:off x="1172049" y="2073503"/>
-              <a:ext cx="7090630" cy="3396729"/>
+              <a:ext cx="7090630" cy="3397293"/>
             </a:xfrm>
             <a:custGeom>
               <a:avLst/>
               <a:pathLst>
-                <a:path w="7090630" h="3396729">
+                <a:path w="7090630" h="3397293">
                   <a:moveTo>
-                    <a:pt x="1077353" y="0"/>
+                    <a:pt x="1084192" y="0"/>
                   </a:moveTo>
                   <a:lnTo>
-                    <a:pt x="1145960" y="143739"/>
-                  </a:lnTo>
-                  <a:lnTo>
-                    <a:pt x="1217582" y="287345"/>
-                  </a:lnTo>
-                  <a:lnTo>
-                    <a:pt x="1289205" y="424776"/>
-                  </a:lnTo>
-                  <a:lnTo>
-                    <a:pt x="1360827" y="556298"/>
-                  </a:lnTo>
-                  <a:lnTo>
-                    <a:pt x="1432450" y="682165"/>
-                  </a:lnTo>
-                  <a:lnTo>
-                    <a:pt x="1504073" y="802621"/>
-                  </a:lnTo>
-                  <a:lnTo>
-                    <a:pt x="1575695" y="917897"/>
-                  </a:lnTo>
-                  <a:lnTo>
-                    <a:pt x="1647318" y="1028218"/>
-                  </a:lnTo>
-                  <a:lnTo>
-                    <a:pt x="1718940" y="1133795"/>
-                  </a:lnTo>
-                  <a:lnTo>
-                    <a:pt x="1790563" y="1234832"/>
-                  </a:lnTo>
-                  <a:lnTo>
-                    <a:pt x="1862185" y="1331525"/>
-                  </a:lnTo>
-                  <a:lnTo>
-                    <a:pt x="1933808" y="1424061"/>
-                  </a:lnTo>
-                  <a:lnTo>
-                    <a:pt x="2005430" y="1512619"/>
-                  </a:lnTo>
-                  <a:lnTo>
-                    <a:pt x="2077053" y="1597369"/>
-                  </a:lnTo>
-                  <a:lnTo>
-                    <a:pt x="2148675" y="1678474"/>
-                  </a:lnTo>
-                  <a:lnTo>
-                    <a:pt x="2220298" y="1756093"/>
-                  </a:lnTo>
-                  <a:lnTo>
-                    <a:pt x="2291920" y="1830375"/>
-                  </a:lnTo>
-                  <a:lnTo>
-                    <a:pt x="2363543" y="1901462"/>
-                  </a:lnTo>
-                  <a:lnTo>
-                    <a:pt x="2435165" y="1969494"/>
-                  </a:lnTo>
-                  <a:lnTo>
-                    <a:pt x="2506788" y="2034600"/>
-                  </a:lnTo>
-                  <a:lnTo>
-                    <a:pt x="2578410" y="2096907"/>
-                  </a:lnTo>
-                  <a:lnTo>
-                    <a:pt x="2650033" y="2156535"/>
-                  </a:lnTo>
-                  <a:lnTo>
-                    <a:pt x="2721655" y="2213599"/>
-                  </a:lnTo>
-                  <a:lnTo>
-                    <a:pt x="2793278" y="2268210"/>
-                  </a:lnTo>
-                  <a:lnTo>
-                    <a:pt x="2864901" y="2320472"/>
-                  </a:lnTo>
-                  <a:lnTo>
-                    <a:pt x="2936523" y="2370488"/>
-                  </a:lnTo>
-                  <a:lnTo>
-                    <a:pt x="3008146" y="2418353"/>
-                  </a:lnTo>
-                  <a:lnTo>
-                    <a:pt x="3079768" y="2464160"/>
-                  </a:lnTo>
-                  <a:lnTo>
-                    <a:pt x="3151391" y="2507998"/>
-                  </a:lnTo>
-                  <a:lnTo>
-                    <a:pt x="3223013" y="2549951"/>
-                  </a:lnTo>
-                  <a:lnTo>
-                    <a:pt x="3294636" y="2590100"/>
-                  </a:lnTo>
-                  <a:lnTo>
-                    <a:pt x="3366258" y="2628523"/>
-                  </a:lnTo>
-                  <a:lnTo>
-                    <a:pt x="3437881" y="2651630"/>
-                  </a:lnTo>
-                  <a:lnTo>
-                    <a:pt x="3509503" y="2642844"/>
-                  </a:lnTo>
-                  <a:lnTo>
-                    <a:pt x="3581126" y="2633966"/>
-                  </a:lnTo>
-                  <a:lnTo>
-                    <a:pt x="3652748" y="2624994"/>
-                  </a:lnTo>
-                  <a:lnTo>
-                    <a:pt x="3724371" y="2615927"/>
-                  </a:lnTo>
-                  <a:lnTo>
-                    <a:pt x="3795993" y="2606765"/>
-                  </a:lnTo>
-                  <a:lnTo>
-                    <a:pt x="3867616" y="2597505"/>
-                  </a:lnTo>
-                  <a:lnTo>
-                    <a:pt x="3939238" y="2588149"/>
-                  </a:lnTo>
-                  <a:lnTo>
-                    <a:pt x="4010861" y="2578693"/>
-                  </a:lnTo>
-                  <a:lnTo>
-                    <a:pt x="4082483" y="2569137"/>
-                  </a:lnTo>
-                  <a:lnTo>
-                    <a:pt x="4154106" y="2559481"/>
-                  </a:lnTo>
-                  <a:lnTo>
-                    <a:pt x="4225729" y="2549722"/>
-                  </a:lnTo>
-                  <a:lnTo>
-                    <a:pt x="4297351" y="2539861"/>
-                  </a:lnTo>
-                  <a:lnTo>
-                    <a:pt x="4368974" y="2529895"/>
-                  </a:lnTo>
-                  <a:lnTo>
-                    <a:pt x="4440596" y="2519825"/>
-                  </a:lnTo>
-                  <a:lnTo>
-                    <a:pt x="4512219" y="2509647"/>
-                  </a:lnTo>
-                  <a:lnTo>
-                    <a:pt x="4583841" y="2499363"/>
-                  </a:lnTo>
-                  <a:lnTo>
-                    <a:pt x="4655464" y="2488970"/>
-                  </a:lnTo>
-                  <a:lnTo>
-                    <a:pt x="4727086" y="2478467"/>
-                  </a:lnTo>
-                  <a:lnTo>
-                    <a:pt x="4798709" y="2467853"/>
-                  </a:lnTo>
-                  <a:lnTo>
-                    <a:pt x="4870331" y="2457127"/>
-                  </a:lnTo>
-                  <a:lnTo>
-                    <a:pt x="4941954" y="2446288"/>
-                  </a:lnTo>
-                  <a:lnTo>
-                    <a:pt x="5013576" y="2435335"/>
-                  </a:lnTo>
-                  <a:lnTo>
-                    <a:pt x="5085199" y="2424266"/>
-                  </a:lnTo>
-                  <a:lnTo>
-                    <a:pt x="5156821" y="2413080"/>
-                  </a:lnTo>
-                  <a:lnTo>
-                    <a:pt x="5228444" y="2401776"/>
-                  </a:lnTo>
-                  <a:lnTo>
-                    <a:pt x="5300066" y="2390352"/>
-                  </a:lnTo>
-                  <a:lnTo>
-                    <a:pt x="5371689" y="2378808"/>
-                  </a:lnTo>
-                  <a:lnTo>
-                    <a:pt x="5443311" y="2367142"/>
-                  </a:lnTo>
-                  <a:lnTo>
-                    <a:pt x="5514934" y="2355353"/>
-                  </a:lnTo>
-                  <a:lnTo>
-                    <a:pt x="5586557" y="2343439"/>
-                  </a:lnTo>
-                  <a:lnTo>
-                    <a:pt x="5658179" y="2331400"/>
-                  </a:lnTo>
-                  <a:lnTo>
-                    <a:pt x="5729802" y="2319233"/>
-                  </a:lnTo>
-                  <a:lnTo>
-                    <a:pt x="5801424" y="2306938"/>
-                  </a:lnTo>
-                  <a:lnTo>
-                    <a:pt x="5873047" y="2294514"/>
-                  </a:lnTo>
-                  <a:lnTo>
-                    <a:pt x="5944669" y="2281958"/>
-                  </a:lnTo>
-                  <a:lnTo>
-                    <a:pt x="6016292" y="2269269"/>
-                  </a:lnTo>
-                  <a:lnTo>
-                    <a:pt x="6087914" y="2256447"/>
-                  </a:lnTo>
-                  <a:lnTo>
-                    <a:pt x="6159537" y="2243489"/>
-                  </a:lnTo>
-                  <a:lnTo>
-                    <a:pt x="6231159" y="2230394"/>
-                  </a:lnTo>
-                  <a:lnTo>
-                    <a:pt x="6302782" y="2217161"/>
-                  </a:lnTo>
-                  <a:lnTo>
-                    <a:pt x="6374404" y="2203789"/>
-                  </a:lnTo>
-                  <a:lnTo>
-                    <a:pt x="6446027" y="2190275"/>
-                  </a:lnTo>
-                  <a:lnTo>
-                    <a:pt x="6517649" y="2176618"/>
-                  </a:lnTo>
-                  <a:lnTo>
-                    <a:pt x="6589272" y="2162818"/>
-                  </a:lnTo>
-                  <a:lnTo>
-                    <a:pt x="6660894" y="2148871"/>
-                  </a:lnTo>
-                  <a:lnTo>
-                    <a:pt x="6732517" y="2134778"/>
-                  </a:lnTo>
-                  <a:lnTo>
-                    <a:pt x="6804139" y="2120535"/>
-                  </a:lnTo>
-                  <a:lnTo>
-                    <a:pt x="6875762" y="2106143"/>
-                  </a:lnTo>
-                  <a:lnTo>
-                    <a:pt x="6947385" y="2091598"/>
-                  </a:lnTo>
-                  <a:lnTo>
-                    <a:pt x="7019007" y="2076899"/>
-                  </a:lnTo>
-                  <a:lnTo>
-                    <a:pt x="7090630" y="2062046"/>
-                  </a:lnTo>
-                  <a:lnTo>
-                    <a:pt x="7090630" y="3396729"/>
-                  </a:lnTo>
-                  <a:lnTo>
-                    <a:pt x="7019007" y="3392820"/>
-                  </a:lnTo>
-                  <a:lnTo>
-                    <a:pt x="6947385" y="3388735"/>
-                  </a:lnTo>
-                  <a:lnTo>
-                    <a:pt x="6875762" y="3384466"/>
-                  </a:lnTo>
-                  <a:lnTo>
-                    <a:pt x="6804139" y="3380006"/>
-                  </a:lnTo>
-                  <a:lnTo>
-                    <a:pt x="6732517" y="3375345"/>
-                  </a:lnTo>
-                  <a:lnTo>
-                    <a:pt x="6660894" y="3370475"/>
-                  </a:lnTo>
-                  <a:lnTo>
-                    <a:pt x="6589272" y="3365386"/>
-                  </a:lnTo>
-                  <a:lnTo>
-                    <a:pt x="6517649" y="3360068"/>
-                  </a:lnTo>
-                  <a:lnTo>
-                    <a:pt x="6446027" y="3354512"/>
-                  </a:lnTo>
-                  <a:lnTo>
-                    <a:pt x="6374404" y="3348706"/>
-                  </a:lnTo>
-                  <a:lnTo>
-                    <a:pt x="6302782" y="3342639"/>
-                  </a:lnTo>
-                  <a:lnTo>
-                    <a:pt x="6231159" y="3336299"/>
-                  </a:lnTo>
-                  <a:lnTo>
-                    <a:pt x="6159537" y="3329674"/>
-                  </a:lnTo>
-                  <a:lnTo>
-                    <a:pt x="6087914" y="3322752"/>
-                  </a:lnTo>
-                  <a:lnTo>
-                    <a:pt x="6016292" y="3315519"/>
-                  </a:lnTo>
-                  <a:lnTo>
-                    <a:pt x="5944669" y="3307961"/>
-                  </a:lnTo>
-                  <a:lnTo>
-                    <a:pt x="5873047" y="3300064"/>
-                  </a:lnTo>
-                  <a:lnTo>
-                    <a:pt x="5801424" y="3291812"/>
-                  </a:lnTo>
-                  <a:lnTo>
-                    <a:pt x="5729802" y="3283188"/>
-                  </a:lnTo>
-                  <a:lnTo>
-                    <a:pt x="5658179" y="3274178"/>
-                  </a:lnTo>
-                  <a:lnTo>
-                    <a:pt x="5586557" y="3264763"/>
-                  </a:lnTo>
-                  <a:lnTo>
-                    <a:pt x="5514934" y="3254924"/>
-                  </a:lnTo>
-                  <a:lnTo>
-                    <a:pt x="5443311" y="3244644"/>
-                  </a:lnTo>
-                  <a:lnTo>
-                    <a:pt x="5371689" y="3233902"/>
-                  </a:lnTo>
-                  <a:lnTo>
-                    <a:pt x="5300066" y="3222677"/>
-                  </a:lnTo>
-                  <a:lnTo>
-                    <a:pt x="5228444" y="3210948"/>
-                  </a:lnTo>
-                  <a:lnTo>
-                    <a:pt x="5156821" y="3198692"/>
-                  </a:lnTo>
-                  <a:lnTo>
-                    <a:pt x="5085199" y="3185885"/>
-                  </a:lnTo>
-                  <a:lnTo>
-                    <a:pt x="5013576" y="3172503"/>
-                  </a:lnTo>
-                  <a:lnTo>
-                    <a:pt x="4941954" y="3158520"/>
-                  </a:lnTo>
-                  <a:lnTo>
-                    <a:pt x="4870331" y="3143908"/>
-                  </a:lnTo>
-                  <a:lnTo>
-                    <a:pt x="4798709" y="3128640"/>
-                  </a:lnTo>
-                  <a:lnTo>
-                    <a:pt x="4727086" y="3112686"/>
-                  </a:lnTo>
-                  <a:lnTo>
-                    <a:pt x="4655464" y="3096015"/>
-                  </a:lnTo>
-                  <a:lnTo>
-                    <a:pt x="4583841" y="3078596"/>
-                  </a:lnTo>
-                  <a:lnTo>
-                    <a:pt x="4512219" y="3060393"/>
-                  </a:lnTo>
-                  <a:lnTo>
-                    <a:pt x="4440596" y="3041373"/>
-                  </a:lnTo>
-                  <a:lnTo>
-                    <a:pt x="4368974" y="3021499"/>
-                  </a:lnTo>
-                  <a:lnTo>
-                    <a:pt x="4297351" y="3000731"/>
-                  </a:lnTo>
-                  <a:lnTo>
-                    <a:pt x="4225729" y="2979031"/>
-                  </a:lnTo>
-                  <a:lnTo>
-                    <a:pt x="4154106" y="2956355"/>
-                  </a:lnTo>
-                  <a:lnTo>
-                    <a:pt x="4082483" y="2932661"/>
-                  </a:lnTo>
-                  <a:lnTo>
-                    <a:pt x="4010861" y="2907902"/>
-                  </a:lnTo>
-                  <a:lnTo>
-                    <a:pt x="3939238" y="2882031"/>
-                  </a:lnTo>
-                  <a:lnTo>
-                    <a:pt x="3867616" y="2854997"/>
-                  </a:lnTo>
-                  <a:lnTo>
-                    <a:pt x="3795993" y="2826749"/>
-                  </a:lnTo>
-                  <a:lnTo>
-                    <a:pt x="3724371" y="2797232"/>
-                  </a:lnTo>
-                  <a:lnTo>
-                    <a:pt x="3652748" y="2766389"/>
-                  </a:lnTo>
-                  <a:lnTo>
-                    <a:pt x="3581126" y="2734160"/>
-                  </a:lnTo>
-                  <a:lnTo>
-                    <a:pt x="3509503" y="2700484"/>
-                  </a:lnTo>
-                  <a:lnTo>
-                    <a:pt x="3437881" y="2665294"/>
-                  </a:lnTo>
-                  <a:lnTo>
-                    <a:pt x="3366258" y="2660323"/>
-                  </a:lnTo>
-                  <a:lnTo>
-                    <a:pt x="3294636" y="2668926"/>
-                  </a:lnTo>
-                  <a:lnTo>
-                    <a:pt x="3223013" y="2677439"/>
-                  </a:lnTo>
-                  <a:lnTo>
-                    <a:pt x="3151391" y="2685863"/>
-                  </a:lnTo>
-                  <a:lnTo>
-                    <a:pt x="3079768" y="2694199"/>
-                  </a:lnTo>
-                  <a:lnTo>
-                    <a:pt x="3008146" y="2702448"/>
-                  </a:lnTo>
-                  <a:lnTo>
-                    <a:pt x="2936523" y="2710611"/>
-                  </a:lnTo>
-                  <a:lnTo>
-                    <a:pt x="2864901" y="2718689"/>
-                  </a:lnTo>
-                  <a:lnTo>
-                    <a:pt x="2793278" y="2726682"/>
-                  </a:lnTo>
-                  <a:lnTo>
-                    <a:pt x="2721655" y="2734591"/>
-                  </a:lnTo>
-                  <a:lnTo>
-                    <a:pt x="2650033" y="2742418"/>
-                  </a:lnTo>
-                  <a:lnTo>
-                    <a:pt x="2578410" y="2750163"/>
-                  </a:lnTo>
-                  <a:lnTo>
-                    <a:pt x="2506788" y="2757828"/>
-                  </a:lnTo>
-                  <a:lnTo>
-                    <a:pt x="2435165" y="2765412"/>
-                  </a:lnTo>
-                  <a:lnTo>
-                    <a:pt x="2363543" y="2772917"/>
-                  </a:lnTo>
-                  <a:lnTo>
-                    <a:pt x="2291920" y="2780343"/>
-                  </a:lnTo>
-                  <a:lnTo>
-                    <a:pt x="2220298" y="2787692"/>
-                  </a:lnTo>
-                  <a:lnTo>
-                    <a:pt x="2148675" y="2794964"/>
-                  </a:lnTo>
-                  <a:lnTo>
-                    <a:pt x="2077053" y="2802161"/>
-                  </a:lnTo>
-                  <a:lnTo>
-                    <a:pt x="2005430" y="2809282"/>
-                  </a:lnTo>
-                  <a:lnTo>
-                    <a:pt x="1933808" y="2816328"/>
-                  </a:lnTo>
-                  <a:lnTo>
-                    <a:pt x="1862185" y="2823301"/>
-                  </a:lnTo>
-                  <a:lnTo>
-                    <a:pt x="1790563" y="2830201"/>
-                  </a:lnTo>
-                  <a:lnTo>
-                    <a:pt x="1718940" y="2837029"/>
-                  </a:lnTo>
-                  <a:lnTo>
-                    <a:pt x="1647318" y="2843786"/>
-                  </a:lnTo>
-                  <a:lnTo>
-                    <a:pt x="1575695" y="2850472"/>
-                  </a:lnTo>
-                  <a:lnTo>
-                    <a:pt x="1504073" y="2857089"/>
-                  </a:lnTo>
-                  <a:lnTo>
-                    <a:pt x="1432450" y="2863636"/>
-                  </a:lnTo>
-                  <a:lnTo>
-                    <a:pt x="1360827" y="2870114"/>
-                  </a:lnTo>
-                  <a:lnTo>
-                    <a:pt x="1289205" y="2876525"/>
-                  </a:lnTo>
-                  <a:lnTo>
-                    <a:pt x="1217582" y="2882870"/>
-                  </a:lnTo>
-                  <a:lnTo>
-                    <a:pt x="1145960" y="2889147"/>
-                  </a:lnTo>
-                  <a:lnTo>
-                    <a:pt x="1074337" y="2895359"/>
-                  </a:lnTo>
-                  <a:lnTo>
-                    <a:pt x="1002715" y="2901507"/>
-                  </a:lnTo>
-                  <a:lnTo>
-                    <a:pt x="931092" y="2907590"/>
-                  </a:lnTo>
-                  <a:lnTo>
-                    <a:pt x="859470" y="2913609"/>
-                  </a:lnTo>
-                  <a:lnTo>
-                    <a:pt x="787847" y="2919566"/>
-                  </a:lnTo>
-                  <a:lnTo>
-                    <a:pt x="716225" y="2925460"/>
-                  </a:lnTo>
-                  <a:lnTo>
-                    <a:pt x="644602" y="2931293"/>
-                  </a:lnTo>
-                  <a:lnTo>
-                    <a:pt x="572980" y="2937065"/>
-                  </a:lnTo>
-                  <a:lnTo>
-                    <a:pt x="501357" y="2942777"/>
-                  </a:lnTo>
-                  <a:lnTo>
-                    <a:pt x="429735" y="2948429"/>
-                  </a:lnTo>
-                  <a:lnTo>
-                    <a:pt x="358112" y="2954021"/>
-                  </a:lnTo>
-                  <a:lnTo>
-                    <a:pt x="286490" y="2959556"/>
-                  </a:lnTo>
-                  <a:lnTo>
-                    <a:pt x="214867" y="2965032"/>
-                  </a:lnTo>
-                  <a:lnTo>
-                    <a:pt x="143245" y="2970452"/>
-                  </a:lnTo>
-                  <a:lnTo>
-                    <a:pt x="71622" y="2975815"/>
-                  </a:lnTo>
-                  <a:lnTo>
-                    <a:pt x="0" y="2981121"/>
+                    <a:pt x="1145960" y="130313"/>
+                  </a:lnTo>
+                  <a:lnTo>
+                    <a:pt x="1217582" y="274902"/>
+                  </a:lnTo>
+                  <a:lnTo>
+                    <a:pt x="1289205" y="413256"/>
+                  </a:lnTo>
+                  <a:lnTo>
+                    <a:pt x="1360827" y="545646"/>
+                  </a:lnTo>
+                  <a:lnTo>
+                    <a:pt x="1432450" y="672327"/>
+                  </a:lnTo>
+                  <a:lnTo>
+                    <a:pt x="1504073" y="793546"/>
+                  </a:lnTo>
+                  <a:lnTo>
+                    <a:pt x="1575695" y="909539"/>
+                  </a:lnTo>
+                  <a:lnTo>
+                    <a:pt x="1647318" y="1020530"/>
+                  </a:lnTo>
+                  <a:lnTo>
+                    <a:pt x="1718940" y="1126736"/>
+                  </a:lnTo>
+                  <a:lnTo>
+                    <a:pt x="1790563" y="1228362"/>
+                  </a:lnTo>
+                  <a:lnTo>
+                    <a:pt x="1862185" y="1325607"/>
+                  </a:lnTo>
+                  <a:lnTo>
+                    <a:pt x="1933808" y="1418659"/>
+                  </a:lnTo>
+                  <a:lnTo>
+                    <a:pt x="2005430" y="1507699"/>
+                  </a:lnTo>
+                  <a:lnTo>
+                    <a:pt x="2077053" y="1592899"/>
+                  </a:lnTo>
+                  <a:lnTo>
+                    <a:pt x="2148675" y="1674426"/>
+                  </a:lnTo>
+                  <a:lnTo>
+                    <a:pt x="2220298" y="1752438"/>
+                  </a:lnTo>
+                  <a:lnTo>
+                    <a:pt x="2291920" y="1827087"/>
+                  </a:lnTo>
+                  <a:lnTo>
+                    <a:pt x="2363543" y="1898516"/>
+                  </a:lnTo>
+                  <a:lnTo>
+                    <a:pt x="2435165" y="1966866"/>
+                  </a:lnTo>
+                  <a:lnTo>
+                    <a:pt x="2506788" y="2032269"/>
+                  </a:lnTo>
+                  <a:lnTo>
+                    <a:pt x="2578410" y="2094852"/>
+                  </a:lnTo>
+                  <a:lnTo>
+                    <a:pt x="2650033" y="2154737"/>
+                  </a:lnTo>
+                  <a:lnTo>
+                    <a:pt x="2721655" y="2212039"/>
+                  </a:lnTo>
+                  <a:lnTo>
+                    <a:pt x="2793278" y="2266871"/>
+                  </a:lnTo>
+                  <a:lnTo>
+                    <a:pt x="2864901" y="2319339"/>
+                  </a:lnTo>
+                  <a:lnTo>
+                    <a:pt x="2936523" y="2369544"/>
+                  </a:lnTo>
+                  <a:lnTo>
+                    <a:pt x="3008146" y="2417585"/>
+                  </a:lnTo>
+                  <a:lnTo>
+                    <a:pt x="3079768" y="2463554"/>
+                  </a:lnTo>
+                  <a:lnTo>
+                    <a:pt x="3151391" y="2507541"/>
+                  </a:lnTo>
+                  <a:lnTo>
+                    <a:pt x="3223013" y="2549632"/>
+                  </a:lnTo>
+                  <a:lnTo>
+                    <a:pt x="3294636" y="2589908"/>
+                  </a:lnTo>
+                  <a:lnTo>
+                    <a:pt x="3366258" y="2628447"/>
+                  </a:lnTo>
+                  <a:lnTo>
+                    <a:pt x="3437881" y="2651633"/>
+                  </a:lnTo>
+                  <a:lnTo>
+                    <a:pt x="3509503" y="2642861"/>
+                  </a:lnTo>
+                  <a:lnTo>
+                    <a:pt x="3581126" y="2633995"/>
+                  </a:lnTo>
+                  <a:lnTo>
+                    <a:pt x="3652748" y="2625036"/>
+                  </a:lnTo>
+                  <a:lnTo>
+                    <a:pt x="3724371" y="2615983"/>
+                  </a:lnTo>
+                  <a:lnTo>
+                    <a:pt x="3795993" y="2606835"/>
+                  </a:lnTo>
+                  <a:lnTo>
+                    <a:pt x="3867616" y="2597589"/>
+                  </a:lnTo>
+                  <a:lnTo>
+                    <a:pt x="3939238" y="2588247"/>
+                  </a:lnTo>
+                  <a:lnTo>
+                    <a:pt x="4010861" y="2578806"/>
+                  </a:lnTo>
+                  <a:lnTo>
+                    <a:pt x="4082483" y="2569265"/>
+                  </a:lnTo>
+                  <a:lnTo>
+                    <a:pt x="4154106" y="2559624"/>
+                  </a:lnTo>
+                  <a:lnTo>
+                    <a:pt x="4225729" y="2549881"/>
+                  </a:lnTo>
+                  <a:lnTo>
+                    <a:pt x="4297351" y="2540035"/>
+                  </a:lnTo>
+                  <a:lnTo>
+                    <a:pt x="4368974" y="2530086"/>
+                  </a:lnTo>
+                  <a:lnTo>
+                    <a:pt x="4440596" y="2520032"/>
+                  </a:lnTo>
+                  <a:lnTo>
+                    <a:pt x="4512219" y="2509871"/>
+                  </a:lnTo>
+                  <a:lnTo>
+                    <a:pt x="4583841" y="2499604"/>
+                  </a:lnTo>
+                  <a:lnTo>
+                    <a:pt x="4655464" y="2489228"/>
+                  </a:lnTo>
+                  <a:lnTo>
+                    <a:pt x="4727086" y="2478743"/>
+                  </a:lnTo>
+                  <a:lnTo>
+                    <a:pt x="4798709" y="2468148"/>
+                  </a:lnTo>
+                  <a:lnTo>
+                    <a:pt x="4870331" y="2457440"/>
+                  </a:lnTo>
+                  <a:lnTo>
+                    <a:pt x="4941954" y="2446620"/>
+                  </a:lnTo>
+                  <a:lnTo>
+                    <a:pt x="5013576" y="2435686"/>
+                  </a:lnTo>
+                  <a:lnTo>
+                    <a:pt x="5085199" y="2424636"/>
+                  </a:lnTo>
+                  <a:lnTo>
+                    <a:pt x="5156821" y="2413470"/>
+                  </a:lnTo>
+                  <a:lnTo>
+                    <a:pt x="5228444" y="2402186"/>
+                  </a:lnTo>
+                  <a:lnTo>
+                    <a:pt x="5300066" y="2390784"/>
+                  </a:lnTo>
+                  <a:lnTo>
+                    <a:pt x="5371689" y="2379261"/>
+                  </a:lnTo>
+                  <a:lnTo>
+                    <a:pt x="5443311" y="2367616"/>
+                  </a:lnTo>
+                  <a:lnTo>
+                    <a:pt x="5514934" y="2355849"/>
+                  </a:lnTo>
+                  <a:lnTo>
+                    <a:pt x="5586557" y="2343958"/>
+                  </a:lnTo>
+                  <a:lnTo>
+                    <a:pt x="5658179" y="2331941"/>
+                  </a:lnTo>
+                  <a:lnTo>
+                    <a:pt x="5729802" y="2319798"/>
+                  </a:lnTo>
+                  <a:lnTo>
+                    <a:pt x="5801424" y="2307527"/>
+                  </a:lnTo>
+                  <a:lnTo>
+                    <a:pt x="5873047" y="2295126"/>
+                  </a:lnTo>
+                  <a:lnTo>
+                    <a:pt x="5944669" y="2282595"/>
+                  </a:lnTo>
+                  <a:lnTo>
+                    <a:pt x="6016292" y="2269931"/>
+                  </a:lnTo>
+                  <a:lnTo>
+                    <a:pt x="6087914" y="2257134"/>
+                  </a:lnTo>
+                  <a:lnTo>
+                    <a:pt x="6159537" y="2244202"/>
+                  </a:lnTo>
+                  <a:lnTo>
+                    <a:pt x="6231159" y="2231134"/>
+                  </a:lnTo>
+                  <a:lnTo>
+                    <a:pt x="6302782" y="2217928"/>
+                  </a:lnTo>
+                  <a:lnTo>
+                    <a:pt x="6374404" y="2204582"/>
+                  </a:lnTo>
+                  <a:lnTo>
+                    <a:pt x="6446027" y="2191096"/>
+                  </a:lnTo>
+                  <a:lnTo>
+                    <a:pt x="6517649" y="2177468"/>
+                  </a:lnTo>
+                  <a:lnTo>
+                    <a:pt x="6589272" y="2163696"/>
+                  </a:lnTo>
+                  <a:lnTo>
+                    <a:pt x="6660894" y="2149779"/>
+                  </a:lnTo>
+                  <a:lnTo>
+                    <a:pt x="6732517" y="2135715"/>
+                  </a:lnTo>
+                  <a:lnTo>
+                    <a:pt x="6804139" y="2121503"/>
+                  </a:lnTo>
+                  <a:lnTo>
+                    <a:pt x="6875762" y="2107141"/>
+                  </a:lnTo>
+                  <a:lnTo>
+                    <a:pt x="6947385" y="2092628"/>
+                  </a:lnTo>
+                  <a:lnTo>
+                    <a:pt x="7019007" y="2077962"/>
+                  </a:lnTo>
+                  <a:lnTo>
+                    <a:pt x="7090630" y="2063141"/>
+                  </a:lnTo>
+                  <a:lnTo>
+                    <a:pt x="7090630" y="3397293"/>
+                  </a:lnTo>
+                  <a:lnTo>
+                    <a:pt x="7019007" y="3393397"/>
+                  </a:lnTo>
+                  <a:lnTo>
+                    <a:pt x="6947385" y="3389326"/>
+                  </a:lnTo>
+                  <a:lnTo>
+                    <a:pt x="6875762" y="3385071"/>
+                  </a:lnTo>
+                  <a:lnTo>
+                    <a:pt x="6804139" y="3380625"/>
+                  </a:lnTo>
+                  <a:lnTo>
+                    <a:pt x="6732517" y="3375978"/>
+                  </a:lnTo>
+                  <a:lnTo>
+                    <a:pt x="6660894" y="3371122"/>
+                  </a:lnTo>
+                  <a:lnTo>
+                    <a:pt x="6589272" y="3366048"/>
+                  </a:lnTo>
+                  <a:lnTo>
+                    <a:pt x="6517649" y="3360744"/>
+                  </a:lnTo>
+                  <a:lnTo>
+                    <a:pt x="6446027" y="3355202"/>
+                  </a:lnTo>
+                  <a:lnTo>
+                    <a:pt x="6374404" y="3349410"/>
+                  </a:lnTo>
+                  <a:lnTo>
+                    <a:pt x="6302782" y="3343357"/>
+                  </a:lnTo>
+                  <a:lnTo>
+                    <a:pt x="6231159" y="3337031"/>
+                  </a:lnTo>
+                  <a:lnTo>
+                    <a:pt x="6159537" y="3330420"/>
+                  </a:lnTo>
+                  <a:lnTo>
+                    <a:pt x="6087914" y="3323511"/>
+                  </a:lnTo>
+                  <a:lnTo>
+                    <a:pt x="6016292" y="3316291"/>
+                  </a:lnTo>
+                  <a:lnTo>
+                    <a:pt x="5944669" y="3308745"/>
+                  </a:lnTo>
+                  <a:lnTo>
+                    <a:pt x="5873047" y="3300860"/>
+                  </a:lnTo>
+                  <a:lnTo>
+                    <a:pt x="5801424" y="3292619"/>
+                  </a:lnTo>
+                  <a:lnTo>
+                    <a:pt x="5729802" y="3284007"/>
+                  </a:lnTo>
+                  <a:lnTo>
+                    <a:pt x="5658179" y="3275007"/>
+                  </a:lnTo>
+                  <a:lnTo>
+                    <a:pt x="5586557" y="3265601"/>
+                  </a:lnTo>
+                  <a:lnTo>
+                    <a:pt x="5514934" y="3255771"/>
+                  </a:lnTo>
+                  <a:lnTo>
+                    <a:pt x="5443311" y="3245499"/>
+                  </a:lnTo>
+                  <a:lnTo>
+                    <a:pt x="5371689" y="3234764"/>
+                  </a:lnTo>
+                  <a:lnTo>
+                    <a:pt x="5300066" y="3223545"/>
+                  </a:lnTo>
+                  <a:lnTo>
+                    <a:pt x="5228444" y="3211820"/>
+                  </a:lnTo>
+                  <a:lnTo>
+                    <a:pt x="5156821" y="3199567"/>
+                  </a:lnTo>
+                  <a:lnTo>
+                    <a:pt x="5085199" y="3186762"/>
+                  </a:lnTo>
+                  <a:lnTo>
+                    <a:pt x="5013576" y="3173380"/>
+                  </a:lnTo>
+                  <a:lnTo>
+                    <a:pt x="4941954" y="3159395"/>
+                  </a:lnTo>
+                  <a:lnTo>
+                    <a:pt x="4870331" y="3144780"/>
+                  </a:lnTo>
+                  <a:lnTo>
+                    <a:pt x="4798709" y="3129507"/>
+                  </a:lnTo>
+                  <a:lnTo>
+                    <a:pt x="4727086" y="3113545"/>
+                  </a:lnTo>
+                  <a:lnTo>
+                    <a:pt x="4655464" y="3096864"/>
+                  </a:lnTo>
+                  <a:lnTo>
+                    <a:pt x="4583841" y="3079431"/>
+                  </a:lnTo>
+                  <a:lnTo>
+                    <a:pt x="4512219" y="3061213"/>
+                  </a:lnTo>
+                  <a:lnTo>
+                    <a:pt x="4440596" y="3042173"/>
+                  </a:lnTo>
+                  <a:lnTo>
+                    <a:pt x="4368974" y="3022276"/>
+                  </a:lnTo>
+                  <a:lnTo>
+                    <a:pt x="4297351" y="3001483"/>
+                  </a:lnTo>
+                  <a:lnTo>
+                    <a:pt x="4225729" y="2979752"/>
+                  </a:lnTo>
+                  <a:lnTo>
+                    <a:pt x="4154106" y="2957042"/>
+                  </a:lnTo>
+                  <a:lnTo>
+                    <a:pt x="4082483" y="2933309"/>
+                  </a:lnTo>
+                  <a:lnTo>
+                    <a:pt x="4010861" y="2908507"/>
+                  </a:lnTo>
+                  <a:lnTo>
+                    <a:pt x="3939238" y="2882587"/>
+                  </a:lnTo>
+                  <a:lnTo>
+                    <a:pt x="3867616" y="2855499"/>
+                  </a:lnTo>
+                  <a:lnTo>
+                    <a:pt x="3795993" y="2827190"/>
+                  </a:lnTo>
+                  <a:lnTo>
+                    <a:pt x="3724371" y="2797606"/>
+                  </a:lnTo>
+                  <a:lnTo>
+                    <a:pt x="3652748" y="2766689"/>
+                  </a:lnTo>
+                  <a:lnTo>
+                    <a:pt x="3581126" y="2734379"/>
+                  </a:lnTo>
+                  <a:lnTo>
+                    <a:pt x="3509503" y="2700613"/>
+                  </a:lnTo>
+                  <a:lnTo>
+                    <a:pt x="3437881" y="2665325"/>
+                  </a:lnTo>
+                  <a:lnTo>
+                    <a:pt x="3366258" y="2660315"/>
+                  </a:lnTo>
+                  <a:lnTo>
+                    <a:pt x="3294636" y="2668905"/>
+                  </a:lnTo>
+                  <a:lnTo>
+                    <a:pt x="3223013" y="2677407"/>
+                  </a:lnTo>
+                  <a:lnTo>
+                    <a:pt x="3151391" y="2685819"/>
+                  </a:lnTo>
+                  <a:lnTo>
+                    <a:pt x="3079768" y="2694144"/>
+                  </a:lnTo>
+                  <a:lnTo>
+                    <a:pt x="3008146" y="2702381"/>
+                  </a:lnTo>
+                  <a:lnTo>
+                    <a:pt x="2936523" y="2710533"/>
+                  </a:lnTo>
+                  <a:lnTo>
+                    <a:pt x="2864901" y="2718600"/>
+                  </a:lnTo>
+                  <a:lnTo>
+                    <a:pt x="2793278" y="2726583"/>
+                  </a:lnTo>
+                  <a:lnTo>
+                    <a:pt x="2721655" y="2734482"/>
+                  </a:lnTo>
+                  <a:lnTo>
+                    <a:pt x="2650033" y="2742299"/>
+                  </a:lnTo>
+                  <a:lnTo>
+                    <a:pt x="2578410" y="2750035"/>
+                  </a:lnTo>
+                  <a:lnTo>
+                    <a:pt x="2506788" y="2757689"/>
+                  </a:lnTo>
+                  <a:lnTo>
+                    <a:pt x="2435165" y="2765264"/>
+                  </a:lnTo>
+                  <a:lnTo>
+                    <a:pt x="2363543" y="2772760"/>
+                  </a:lnTo>
+                  <a:lnTo>
+                    <a:pt x="2291920" y="2780178"/>
+                  </a:lnTo>
+                  <a:lnTo>
+                    <a:pt x="2220298" y="2787518"/>
+                  </a:lnTo>
+                  <a:lnTo>
+                    <a:pt x="2148675" y="2794781"/>
+                  </a:lnTo>
+                  <a:lnTo>
+                    <a:pt x="2077053" y="2801969"/>
+                  </a:lnTo>
+                  <a:lnTo>
+                    <a:pt x="2005430" y="2809082"/>
+                  </a:lnTo>
+                  <a:lnTo>
+                    <a:pt x="1933808" y="2816121"/>
+                  </a:lnTo>
+                  <a:lnTo>
+                    <a:pt x="1862185" y="2823086"/>
+                  </a:lnTo>
+                  <a:lnTo>
+                    <a:pt x="1790563" y="2829979"/>
+                  </a:lnTo>
+                  <a:lnTo>
+                    <a:pt x="1718940" y="2836799"/>
+                  </a:lnTo>
+                  <a:lnTo>
+                    <a:pt x="1647318" y="2843549"/>
+                  </a:lnTo>
+                  <a:lnTo>
+                    <a:pt x="1575695" y="2850228"/>
+                  </a:lnTo>
+                  <a:lnTo>
+                    <a:pt x="1504073" y="2856837"/>
+                  </a:lnTo>
+                  <a:lnTo>
+                    <a:pt x="1432450" y="2863378"/>
+                  </a:lnTo>
+                  <a:lnTo>
+                    <a:pt x="1360827" y="2869850"/>
+                  </a:lnTo>
+                  <a:lnTo>
+                    <a:pt x="1289205" y="2876255"/>
+                  </a:lnTo>
+                  <a:lnTo>
+                    <a:pt x="1217582" y="2882593"/>
+                  </a:lnTo>
+                  <a:lnTo>
+                    <a:pt x="1145960" y="2888864"/>
+                  </a:lnTo>
+                  <a:lnTo>
+                    <a:pt x="1074337" y="2895071"/>
+                  </a:lnTo>
+                  <a:lnTo>
+                    <a:pt x="1002715" y="2901212"/>
+                  </a:lnTo>
+                  <a:lnTo>
+                    <a:pt x="931092" y="2907290"/>
+                  </a:lnTo>
+                  <a:lnTo>
+                    <a:pt x="859470" y="2913304"/>
+                  </a:lnTo>
+                  <a:lnTo>
+                    <a:pt x="787847" y="2919255"/>
+                  </a:lnTo>
+                  <a:lnTo>
+                    <a:pt x="716225" y="2925144"/>
+                  </a:lnTo>
+                  <a:lnTo>
+                    <a:pt x="644602" y="2930972"/>
+                  </a:lnTo>
+                  <a:lnTo>
+                    <a:pt x="572980" y="2936739"/>
+                  </a:lnTo>
+                  <a:lnTo>
+                    <a:pt x="501357" y="2942446"/>
+                  </a:lnTo>
+                  <a:lnTo>
+                    <a:pt x="429735" y="2948093"/>
+                  </a:lnTo>
+                  <a:lnTo>
+                    <a:pt x="358112" y="2953682"/>
+                  </a:lnTo>
+                  <a:lnTo>
+                    <a:pt x="286490" y="2959212"/>
+                  </a:lnTo>
+                  <a:lnTo>
+                    <a:pt x="214867" y="2964684"/>
+                  </a:lnTo>
+                  <a:lnTo>
+                    <a:pt x="143245" y="2970100"/>
+                  </a:lnTo>
+                  <a:lnTo>
+                    <a:pt x="71622" y="2975458"/>
+                  </a:lnTo>
+                  <a:lnTo>
+                    <a:pt x="0" y="2980761"/>
                   </a:lnTo>
                   <a:close/>
                 </a:path>
@@ -3545,267 +3545,267 @@
           </p:nvSpPr>
           <p:spPr>
             <a:xfrm>
-              <a:off x="2249402" y="2073503"/>
-              <a:ext cx="6013276" cy="2651630"/>
+              <a:off x="2256242" y="2073503"/>
+              <a:ext cx="6006437" cy="2651633"/>
             </a:xfrm>
             <a:custGeom>
               <a:avLst/>
               <a:pathLst>
-                <a:path w="6013276" h="2651630">
+                <a:path w="6006437" h="2651633">
                   <a:moveTo>
                     <a:pt x="0" y="0"/>
                   </a:moveTo>
                   <a:lnTo>
-                    <a:pt x="68607" y="143739"/>
-                  </a:lnTo>
-                  <a:lnTo>
-                    <a:pt x="140229" y="287345"/>
-                  </a:lnTo>
-                  <a:lnTo>
-                    <a:pt x="211852" y="424776"/>
-                  </a:lnTo>
-                  <a:lnTo>
-                    <a:pt x="283474" y="556298"/>
-                  </a:lnTo>
-                  <a:lnTo>
-                    <a:pt x="355097" y="682165"/>
-                  </a:lnTo>
-                  <a:lnTo>
-                    <a:pt x="426719" y="802621"/>
-                  </a:lnTo>
-                  <a:lnTo>
-                    <a:pt x="498342" y="917897"/>
-                  </a:lnTo>
-                  <a:lnTo>
-                    <a:pt x="569964" y="1028218"/>
-                  </a:lnTo>
-                  <a:lnTo>
-                    <a:pt x="641587" y="1133795"/>
-                  </a:lnTo>
-                  <a:lnTo>
-                    <a:pt x="713209" y="1234832"/>
-                  </a:lnTo>
-                  <a:lnTo>
-                    <a:pt x="784832" y="1331525"/>
-                  </a:lnTo>
-                  <a:lnTo>
-                    <a:pt x="856454" y="1424061"/>
-                  </a:lnTo>
-                  <a:lnTo>
-                    <a:pt x="928077" y="1512619"/>
-                  </a:lnTo>
-                  <a:lnTo>
-                    <a:pt x="999699" y="1597369"/>
-                  </a:lnTo>
-                  <a:lnTo>
-                    <a:pt x="1071322" y="1678474"/>
-                  </a:lnTo>
-                  <a:lnTo>
-                    <a:pt x="1142944" y="1756093"/>
-                  </a:lnTo>
-                  <a:lnTo>
-                    <a:pt x="1214567" y="1830375"/>
-                  </a:lnTo>
-                  <a:lnTo>
-                    <a:pt x="1286189" y="1901462"/>
-                  </a:lnTo>
-                  <a:lnTo>
-                    <a:pt x="1357812" y="1969494"/>
-                  </a:lnTo>
-                  <a:lnTo>
-                    <a:pt x="1429435" y="2034600"/>
-                  </a:lnTo>
-                  <a:lnTo>
-                    <a:pt x="1501057" y="2096907"/>
-                  </a:lnTo>
-                  <a:lnTo>
-                    <a:pt x="1572680" y="2156535"/>
-                  </a:lnTo>
-                  <a:lnTo>
-                    <a:pt x="1644302" y="2213599"/>
-                  </a:lnTo>
-                  <a:lnTo>
-                    <a:pt x="1715925" y="2268210"/>
-                  </a:lnTo>
-                  <a:lnTo>
-                    <a:pt x="1787547" y="2320472"/>
-                  </a:lnTo>
-                  <a:lnTo>
-                    <a:pt x="1859170" y="2370488"/>
-                  </a:lnTo>
-                  <a:lnTo>
-                    <a:pt x="1930792" y="2418353"/>
-                  </a:lnTo>
-                  <a:lnTo>
-                    <a:pt x="2002415" y="2464160"/>
-                  </a:lnTo>
-                  <a:lnTo>
-                    <a:pt x="2074037" y="2507998"/>
-                  </a:lnTo>
-                  <a:lnTo>
-                    <a:pt x="2145660" y="2549951"/>
-                  </a:lnTo>
-                  <a:lnTo>
-                    <a:pt x="2217282" y="2590100"/>
-                  </a:lnTo>
-                  <a:lnTo>
-                    <a:pt x="2288905" y="2628523"/>
-                  </a:lnTo>
-                  <a:lnTo>
-                    <a:pt x="2360527" y="2651630"/>
-                  </a:lnTo>
-                  <a:lnTo>
-                    <a:pt x="2432150" y="2642844"/>
-                  </a:lnTo>
-                  <a:lnTo>
-                    <a:pt x="2503772" y="2633966"/>
-                  </a:lnTo>
-                  <a:lnTo>
-                    <a:pt x="2575395" y="2624994"/>
-                  </a:lnTo>
-                  <a:lnTo>
-                    <a:pt x="2647017" y="2615927"/>
-                  </a:lnTo>
-                  <a:lnTo>
-                    <a:pt x="2718640" y="2606765"/>
-                  </a:lnTo>
-                  <a:lnTo>
-                    <a:pt x="2790263" y="2597505"/>
-                  </a:lnTo>
-                  <a:lnTo>
-                    <a:pt x="2861885" y="2588149"/>
-                  </a:lnTo>
-                  <a:lnTo>
-                    <a:pt x="2933508" y="2578693"/>
-                  </a:lnTo>
-                  <a:lnTo>
-                    <a:pt x="3005130" y="2569137"/>
-                  </a:lnTo>
-                  <a:lnTo>
-                    <a:pt x="3076753" y="2559481"/>
-                  </a:lnTo>
-                  <a:lnTo>
-                    <a:pt x="3148375" y="2549722"/>
-                  </a:lnTo>
-                  <a:lnTo>
-                    <a:pt x="3219998" y="2539861"/>
-                  </a:lnTo>
-                  <a:lnTo>
-                    <a:pt x="3291620" y="2529895"/>
-                  </a:lnTo>
-                  <a:lnTo>
-                    <a:pt x="3363243" y="2519825"/>
-                  </a:lnTo>
-                  <a:lnTo>
-                    <a:pt x="3434865" y="2509647"/>
-                  </a:lnTo>
-                  <a:lnTo>
-                    <a:pt x="3506488" y="2499363"/>
-                  </a:lnTo>
-                  <a:lnTo>
-                    <a:pt x="3578110" y="2488970"/>
-                  </a:lnTo>
-                  <a:lnTo>
-                    <a:pt x="3649733" y="2478467"/>
-                  </a:lnTo>
-                  <a:lnTo>
-                    <a:pt x="3721355" y="2467853"/>
-                  </a:lnTo>
-                  <a:lnTo>
-                    <a:pt x="3792978" y="2457127"/>
-                  </a:lnTo>
-                  <a:lnTo>
-                    <a:pt x="3864600" y="2446288"/>
-                  </a:lnTo>
-                  <a:lnTo>
-                    <a:pt x="3936223" y="2435335"/>
-                  </a:lnTo>
-                  <a:lnTo>
-                    <a:pt x="4007845" y="2424266"/>
-                  </a:lnTo>
-                  <a:lnTo>
-                    <a:pt x="4079468" y="2413080"/>
-                  </a:lnTo>
-                  <a:lnTo>
-                    <a:pt x="4151091" y="2401776"/>
-                  </a:lnTo>
-                  <a:lnTo>
-                    <a:pt x="4222713" y="2390352"/>
-                  </a:lnTo>
-                  <a:lnTo>
-                    <a:pt x="4294336" y="2378808"/>
-                  </a:lnTo>
-                  <a:lnTo>
-                    <a:pt x="4365958" y="2367142"/>
-                  </a:lnTo>
-                  <a:lnTo>
-                    <a:pt x="4437581" y="2355353"/>
-                  </a:lnTo>
-                  <a:lnTo>
-                    <a:pt x="4509203" y="2343439"/>
-                  </a:lnTo>
-                  <a:lnTo>
-                    <a:pt x="4580826" y="2331400"/>
-                  </a:lnTo>
-                  <a:lnTo>
-                    <a:pt x="4652448" y="2319233"/>
-                  </a:lnTo>
-                  <a:lnTo>
-                    <a:pt x="4724071" y="2306938"/>
-                  </a:lnTo>
-                  <a:lnTo>
-                    <a:pt x="4795693" y="2294514"/>
-                  </a:lnTo>
-                  <a:lnTo>
-                    <a:pt x="4867316" y="2281958"/>
-                  </a:lnTo>
-                  <a:lnTo>
-                    <a:pt x="4938938" y="2269269"/>
-                  </a:lnTo>
-                  <a:lnTo>
-                    <a:pt x="5010561" y="2256447"/>
-                  </a:lnTo>
-                  <a:lnTo>
-                    <a:pt x="5082183" y="2243489"/>
-                  </a:lnTo>
-                  <a:lnTo>
-                    <a:pt x="5153806" y="2230394"/>
-                  </a:lnTo>
-                  <a:lnTo>
-                    <a:pt x="5225428" y="2217161"/>
-                  </a:lnTo>
-                  <a:lnTo>
-                    <a:pt x="5297051" y="2203789"/>
-                  </a:lnTo>
-                  <a:lnTo>
-                    <a:pt x="5368673" y="2190275"/>
-                  </a:lnTo>
-                  <a:lnTo>
-                    <a:pt x="5440296" y="2176618"/>
-                  </a:lnTo>
-                  <a:lnTo>
-                    <a:pt x="5511919" y="2162818"/>
-                  </a:lnTo>
-                  <a:lnTo>
-                    <a:pt x="5583541" y="2148871"/>
-                  </a:lnTo>
-                  <a:lnTo>
-                    <a:pt x="5655164" y="2134778"/>
-                  </a:lnTo>
-                  <a:lnTo>
-                    <a:pt x="5726786" y="2120535"/>
-                  </a:lnTo>
-                  <a:lnTo>
-                    <a:pt x="5798409" y="2106143"/>
-                  </a:lnTo>
-                  <a:lnTo>
-                    <a:pt x="5870031" y="2091598"/>
-                  </a:lnTo>
-                  <a:lnTo>
-                    <a:pt x="5941654" y="2076899"/>
-                  </a:lnTo>
-                  <a:lnTo>
-                    <a:pt x="6013276" y="2062046"/>
+                    <a:pt x="61767" y="130313"/>
+                  </a:lnTo>
+                  <a:lnTo>
+                    <a:pt x="133390" y="274902"/>
+                  </a:lnTo>
+                  <a:lnTo>
+                    <a:pt x="205012" y="413256"/>
+                  </a:lnTo>
+                  <a:lnTo>
+                    <a:pt x="276635" y="545646"/>
+                  </a:lnTo>
+                  <a:lnTo>
+                    <a:pt x="348257" y="672327"/>
+                  </a:lnTo>
+                  <a:lnTo>
+                    <a:pt x="419880" y="793546"/>
+                  </a:lnTo>
+                  <a:lnTo>
+                    <a:pt x="491502" y="909539"/>
+                  </a:lnTo>
+                  <a:lnTo>
+                    <a:pt x="563125" y="1020530"/>
+                  </a:lnTo>
+                  <a:lnTo>
+                    <a:pt x="634747" y="1126736"/>
+                  </a:lnTo>
+                  <a:lnTo>
+                    <a:pt x="706370" y="1228362"/>
+                  </a:lnTo>
+                  <a:lnTo>
+                    <a:pt x="777992" y="1325607"/>
+                  </a:lnTo>
+                  <a:lnTo>
+                    <a:pt x="849615" y="1418659"/>
+                  </a:lnTo>
+                  <a:lnTo>
+                    <a:pt x="921237" y="1507699"/>
+                  </a:lnTo>
+                  <a:lnTo>
+                    <a:pt x="992860" y="1592899"/>
+                  </a:lnTo>
+                  <a:lnTo>
+                    <a:pt x="1064483" y="1674426"/>
+                  </a:lnTo>
+                  <a:lnTo>
+                    <a:pt x="1136105" y="1752438"/>
+                  </a:lnTo>
+                  <a:lnTo>
+                    <a:pt x="1207728" y="1827087"/>
+                  </a:lnTo>
+                  <a:lnTo>
+                    <a:pt x="1279350" y="1898516"/>
+                  </a:lnTo>
+                  <a:lnTo>
+                    <a:pt x="1350973" y="1966866"/>
+                  </a:lnTo>
+                  <a:lnTo>
+                    <a:pt x="1422595" y="2032269"/>
+                  </a:lnTo>
+                  <a:lnTo>
+                    <a:pt x="1494218" y="2094852"/>
+                  </a:lnTo>
+                  <a:lnTo>
+                    <a:pt x="1565840" y="2154737"/>
+                  </a:lnTo>
+                  <a:lnTo>
+                    <a:pt x="1637463" y="2212039"/>
+                  </a:lnTo>
+                  <a:lnTo>
+                    <a:pt x="1709085" y="2266871"/>
+                  </a:lnTo>
+                  <a:lnTo>
+                    <a:pt x="1780708" y="2319339"/>
+                  </a:lnTo>
+                  <a:lnTo>
+                    <a:pt x="1852330" y="2369544"/>
+                  </a:lnTo>
+                  <a:lnTo>
+                    <a:pt x="1923953" y="2417585"/>
+                  </a:lnTo>
+                  <a:lnTo>
+                    <a:pt x="1995575" y="2463554"/>
+                  </a:lnTo>
+                  <a:lnTo>
+                    <a:pt x="2067198" y="2507541"/>
+                  </a:lnTo>
+                  <a:lnTo>
+                    <a:pt x="2138820" y="2549632"/>
+                  </a:lnTo>
+                  <a:lnTo>
+                    <a:pt x="2210443" y="2589908"/>
+                  </a:lnTo>
+                  <a:lnTo>
+                    <a:pt x="2282065" y="2628447"/>
+                  </a:lnTo>
+                  <a:lnTo>
+                    <a:pt x="2353688" y="2651633"/>
+                  </a:lnTo>
+                  <a:lnTo>
+                    <a:pt x="2425311" y="2642861"/>
+                  </a:lnTo>
+                  <a:lnTo>
+                    <a:pt x="2496933" y="2633995"/>
+                  </a:lnTo>
+                  <a:lnTo>
+                    <a:pt x="2568556" y="2625036"/>
+                  </a:lnTo>
+                  <a:lnTo>
+                    <a:pt x="2640178" y="2615983"/>
+                  </a:lnTo>
+                  <a:lnTo>
+                    <a:pt x="2711801" y="2606835"/>
+                  </a:lnTo>
+                  <a:lnTo>
+                    <a:pt x="2783423" y="2597589"/>
+                  </a:lnTo>
+                  <a:lnTo>
+                    <a:pt x="2855046" y="2588247"/>
+                  </a:lnTo>
+                  <a:lnTo>
+                    <a:pt x="2926668" y="2578806"/>
+                  </a:lnTo>
+                  <a:lnTo>
+                    <a:pt x="2998291" y="2569265"/>
+                  </a:lnTo>
+                  <a:lnTo>
+                    <a:pt x="3069913" y="2559624"/>
+                  </a:lnTo>
+                  <a:lnTo>
+                    <a:pt x="3141536" y="2549881"/>
+                  </a:lnTo>
+                  <a:lnTo>
+                    <a:pt x="3213158" y="2540035"/>
+                  </a:lnTo>
+                  <a:lnTo>
+                    <a:pt x="3284781" y="2530086"/>
+                  </a:lnTo>
+                  <a:lnTo>
+                    <a:pt x="3356403" y="2520032"/>
+                  </a:lnTo>
+                  <a:lnTo>
+                    <a:pt x="3428026" y="2509871"/>
+                  </a:lnTo>
+                  <a:lnTo>
+                    <a:pt x="3499648" y="2499604"/>
+                  </a:lnTo>
+                  <a:lnTo>
+                    <a:pt x="3571271" y="2489228"/>
+                  </a:lnTo>
+                  <a:lnTo>
+                    <a:pt x="3642893" y="2478743"/>
+                  </a:lnTo>
+                  <a:lnTo>
+                    <a:pt x="3714516" y="2468148"/>
+                  </a:lnTo>
+                  <a:lnTo>
+                    <a:pt x="3786139" y="2457440"/>
+                  </a:lnTo>
+                  <a:lnTo>
+                    <a:pt x="3857761" y="2446620"/>
+                  </a:lnTo>
+                  <a:lnTo>
+                    <a:pt x="3929384" y="2435686"/>
+                  </a:lnTo>
+                  <a:lnTo>
+                    <a:pt x="4001006" y="2424636"/>
+                  </a:lnTo>
+                  <a:lnTo>
+                    <a:pt x="4072629" y="2413470"/>
+                  </a:lnTo>
+                  <a:lnTo>
+                    <a:pt x="4144251" y="2402186"/>
+                  </a:lnTo>
+                  <a:lnTo>
+                    <a:pt x="4215874" y="2390784"/>
+                  </a:lnTo>
+                  <a:lnTo>
+                    <a:pt x="4287496" y="2379261"/>
+                  </a:lnTo>
+                  <a:lnTo>
+                    <a:pt x="4359119" y="2367616"/>
+                  </a:lnTo>
+                  <a:lnTo>
+                    <a:pt x="4430741" y="2355849"/>
+                  </a:lnTo>
+                  <a:lnTo>
+                    <a:pt x="4502364" y="2343958"/>
+                  </a:lnTo>
+                  <a:lnTo>
+                    <a:pt x="4573986" y="2331941"/>
+                  </a:lnTo>
+                  <a:lnTo>
+                    <a:pt x="4645609" y="2319798"/>
+                  </a:lnTo>
+                  <a:lnTo>
+                    <a:pt x="4717231" y="2307527"/>
+                  </a:lnTo>
+                  <a:lnTo>
+                    <a:pt x="4788854" y="2295126"/>
+                  </a:lnTo>
+                  <a:lnTo>
+                    <a:pt x="4860476" y="2282595"/>
+                  </a:lnTo>
+                  <a:lnTo>
+                    <a:pt x="4932099" y="2269931"/>
+                  </a:lnTo>
+                  <a:lnTo>
+                    <a:pt x="5003721" y="2257134"/>
+                  </a:lnTo>
+                  <a:lnTo>
+                    <a:pt x="5075344" y="2244202"/>
+                  </a:lnTo>
+                  <a:lnTo>
+                    <a:pt x="5146967" y="2231134"/>
+                  </a:lnTo>
+                  <a:lnTo>
+                    <a:pt x="5218589" y="2217928"/>
+                  </a:lnTo>
+                  <a:lnTo>
+                    <a:pt x="5290212" y="2204582"/>
+                  </a:lnTo>
+                  <a:lnTo>
+                    <a:pt x="5361834" y="2191096"/>
+                  </a:lnTo>
+                  <a:lnTo>
+                    <a:pt x="5433457" y="2177468"/>
+                  </a:lnTo>
+                  <a:lnTo>
+                    <a:pt x="5505079" y="2163696"/>
+                  </a:lnTo>
+                  <a:lnTo>
+                    <a:pt x="5576702" y="2149779"/>
+                  </a:lnTo>
+                  <a:lnTo>
+                    <a:pt x="5648324" y="2135715"/>
+                  </a:lnTo>
+                  <a:lnTo>
+                    <a:pt x="5719947" y="2121503"/>
+                  </a:lnTo>
+                  <a:lnTo>
+                    <a:pt x="5791569" y="2107141"/>
+                  </a:lnTo>
+                  <a:lnTo>
+                    <a:pt x="5863192" y="2092628"/>
+                  </a:lnTo>
+                  <a:lnTo>
+                    <a:pt x="5934814" y="2077962"/>
+                  </a:lnTo>
+                  <a:lnTo>
+                    <a:pt x="6006437" y="2063141"/>
                   </a:lnTo>
                 </a:path>
               </a:pathLst>
@@ -3825,312 +3825,312 @@
           </p:nvSpPr>
           <p:spPr>
             <a:xfrm>
-              <a:off x="1172049" y="4733826"/>
-              <a:ext cx="7090630" cy="736405"/>
+              <a:off x="1172049" y="4733818"/>
+              <a:ext cx="7090630" cy="736977"/>
             </a:xfrm>
             <a:custGeom>
               <a:avLst/>
               <a:pathLst>
-                <a:path w="7090630" h="736405">
+                <a:path w="7090630" h="736977">
                   <a:moveTo>
-                    <a:pt x="7090630" y="736405"/>
+                    <a:pt x="7090630" y="736977"/>
                   </a:moveTo>
                   <a:lnTo>
-                    <a:pt x="7019007" y="732496"/>
-                  </a:lnTo>
-                  <a:lnTo>
-                    <a:pt x="6947385" y="728411"/>
-                  </a:lnTo>
-                  <a:lnTo>
-                    <a:pt x="6875762" y="724142"/>
-                  </a:lnTo>
-                  <a:lnTo>
-                    <a:pt x="6804139" y="719682"/>
-                  </a:lnTo>
-                  <a:lnTo>
-                    <a:pt x="6732517" y="715021"/>
-                  </a:lnTo>
-                  <a:lnTo>
-                    <a:pt x="6660894" y="710151"/>
-                  </a:lnTo>
-                  <a:lnTo>
-                    <a:pt x="6589272" y="705062"/>
-                  </a:lnTo>
-                  <a:lnTo>
-                    <a:pt x="6517649" y="699744"/>
-                  </a:lnTo>
-                  <a:lnTo>
-                    <a:pt x="6446027" y="694188"/>
-                  </a:lnTo>
-                  <a:lnTo>
-                    <a:pt x="6374404" y="688382"/>
-                  </a:lnTo>
-                  <a:lnTo>
-                    <a:pt x="6302782" y="682315"/>
-                  </a:lnTo>
-                  <a:lnTo>
-                    <a:pt x="6231159" y="675975"/>
-                  </a:lnTo>
-                  <a:lnTo>
-                    <a:pt x="6159537" y="669351"/>
-                  </a:lnTo>
-                  <a:lnTo>
-                    <a:pt x="6087914" y="662429"/>
-                  </a:lnTo>
-                  <a:lnTo>
-                    <a:pt x="6016292" y="655196"/>
-                  </a:lnTo>
-                  <a:lnTo>
-                    <a:pt x="5944669" y="647638"/>
-                  </a:lnTo>
-                  <a:lnTo>
-                    <a:pt x="5873047" y="639740"/>
-                  </a:lnTo>
-                  <a:lnTo>
-                    <a:pt x="5801424" y="631488"/>
-                  </a:lnTo>
-                  <a:lnTo>
-                    <a:pt x="5729802" y="622865"/>
-                  </a:lnTo>
-                  <a:lnTo>
-                    <a:pt x="5658179" y="613854"/>
-                  </a:lnTo>
-                  <a:lnTo>
-                    <a:pt x="5586557" y="604439"/>
-                  </a:lnTo>
-                  <a:lnTo>
-                    <a:pt x="5514934" y="594600"/>
-                  </a:lnTo>
-                  <a:lnTo>
-                    <a:pt x="5443311" y="584320"/>
-                  </a:lnTo>
-                  <a:lnTo>
-                    <a:pt x="5371689" y="573578"/>
-                  </a:lnTo>
-                  <a:lnTo>
-                    <a:pt x="5300066" y="562353"/>
-                  </a:lnTo>
-                  <a:lnTo>
-                    <a:pt x="5228444" y="550624"/>
-                  </a:lnTo>
-                  <a:lnTo>
-                    <a:pt x="5156821" y="538368"/>
-                  </a:lnTo>
-                  <a:lnTo>
-                    <a:pt x="5085199" y="525561"/>
-                  </a:lnTo>
-                  <a:lnTo>
-                    <a:pt x="5013576" y="512179"/>
-                  </a:lnTo>
-                  <a:lnTo>
-                    <a:pt x="4941954" y="498196"/>
-                  </a:lnTo>
-                  <a:lnTo>
-                    <a:pt x="4870331" y="483584"/>
-                  </a:lnTo>
-                  <a:lnTo>
-                    <a:pt x="4798709" y="468316"/>
-                  </a:lnTo>
-                  <a:lnTo>
-                    <a:pt x="4727086" y="452362"/>
-                  </a:lnTo>
-                  <a:lnTo>
-                    <a:pt x="4655464" y="435691"/>
-                  </a:lnTo>
-                  <a:lnTo>
-                    <a:pt x="4583841" y="418272"/>
-                  </a:lnTo>
-                  <a:lnTo>
-                    <a:pt x="4512219" y="400069"/>
-                  </a:lnTo>
-                  <a:lnTo>
-                    <a:pt x="4440596" y="381049"/>
-                  </a:lnTo>
-                  <a:lnTo>
-                    <a:pt x="4368974" y="361175"/>
-                  </a:lnTo>
-                  <a:lnTo>
-                    <a:pt x="4297351" y="340407"/>
-                  </a:lnTo>
-                  <a:lnTo>
-                    <a:pt x="4225729" y="318707"/>
-                  </a:lnTo>
-                  <a:lnTo>
-                    <a:pt x="4154106" y="296031"/>
-                  </a:lnTo>
-                  <a:lnTo>
-                    <a:pt x="4082483" y="272337"/>
-                  </a:lnTo>
-                  <a:lnTo>
-                    <a:pt x="4010861" y="247578"/>
-                  </a:lnTo>
-                  <a:lnTo>
-                    <a:pt x="3939238" y="221707"/>
-                  </a:lnTo>
-                  <a:lnTo>
-                    <a:pt x="3867616" y="194674"/>
-                  </a:lnTo>
-                  <a:lnTo>
-                    <a:pt x="3795993" y="166426"/>
-                  </a:lnTo>
-                  <a:lnTo>
-                    <a:pt x="3724371" y="136909"/>
-                  </a:lnTo>
-                  <a:lnTo>
-                    <a:pt x="3652748" y="106065"/>
-                  </a:lnTo>
-                  <a:lnTo>
-                    <a:pt x="3581126" y="73837"/>
-                  </a:lnTo>
-                  <a:lnTo>
-                    <a:pt x="3509503" y="40160"/>
-                  </a:lnTo>
-                  <a:lnTo>
-                    <a:pt x="3437881" y="4970"/>
+                    <a:pt x="7019007" y="733082"/>
+                  </a:lnTo>
+                  <a:lnTo>
+                    <a:pt x="6947385" y="729011"/>
+                  </a:lnTo>
+                  <a:lnTo>
+                    <a:pt x="6875762" y="724756"/>
+                  </a:lnTo>
+                  <a:lnTo>
+                    <a:pt x="6804139" y="720310"/>
+                  </a:lnTo>
+                  <a:lnTo>
+                    <a:pt x="6732517" y="715663"/>
+                  </a:lnTo>
+                  <a:lnTo>
+                    <a:pt x="6660894" y="710807"/>
+                  </a:lnTo>
+                  <a:lnTo>
+                    <a:pt x="6589272" y="705732"/>
+                  </a:lnTo>
+                  <a:lnTo>
+                    <a:pt x="6517649" y="700429"/>
+                  </a:lnTo>
+                  <a:lnTo>
+                    <a:pt x="6446027" y="694887"/>
+                  </a:lnTo>
+                  <a:lnTo>
+                    <a:pt x="6374404" y="689094"/>
+                  </a:lnTo>
+                  <a:lnTo>
+                    <a:pt x="6302782" y="683041"/>
+                  </a:lnTo>
+                  <a:lnTo>
+                    <a:pt x="6231159" y="676715"/>
+                  </a:lnTo>
+                  <a:lnTo>
+                    <a:pt x="6159537" y="670104"/>
+                  </a:lnTo>
+                  <a:lnTo>
+                    <a:pt x="6087914" y="663196"/>
+                  </a:lnTo>
+                  <a:lnTo>
+                    <a:pt x="6016292" y="655975"/>
+                  </a:lnTo>
+                  <a:lnTo>
+                    <a:pt x="5944669" y="648430"/>
+                  </a:lnTo>
+                  <a:lnTo>
+                    <a:pt x="5873047" y="640545"/>
+                  </a:lnTo>
+                  <a:lnTo>
+                    <a:pt x="5801424" y="632304"/>
+                  </a:lnTo>
+                  <a:lnTo>
+                    <a:pt x="5729802" y="623692"/>
+                  </a:lnTo>
+                  <a:lnTo>
+                    <a:pt x="5658179" y="614691"/>
+                  </a:lnTo>
+                  <a:lnTo>
+                    <a:pt x="5586557" y="605286"/>
+                  </a:lnTo>
+                  <a:lnTo>
+                    <a:pt x="5514934" y="595456"/>
+                  </a:lnTo>
+                  <a:lnTo>
+                    <a:pt x="5443311" y="585184"/>
+                  </a:lnTo>
+                  <a:lnTo>
+                    <a:pt x="5371689" y="574448"/>
+                  </a:lnTo>
+                  <a:lnTo>
+                    <a:pt x="5300066" y="563229"/>
+                  </a:lnTo>
+                  <a:lnTo>
+                    <a:pt x="5228444" y="551505"/>
+                  </a:lnTo>
+                  <a:lnTo>
+                    <a:pt x="5156821" y="539252"/>
+                  </a:lnTo>
+                  <a:lnTo>
+                    <a:pt x="5085199" y="526447"/>
+                  </a:lnTo>
+                  <a:lnTo>
+                    <a:pt x="5013576" y="513065"/>
+                  </a:lnTo>
+                  <a:lnTo>
+                    <a:pt x="4941954" y="499080"/>
+                  </a:lnTo>
+                  <a:lnTo>
+                    <a:pt x="4870331" y="484465"/>
+                  </a:lnTo>
+                  <a:lnTo>
+                    <a:pt x="4798709" y="469191"/>
+                  </a:lnTo>
+                  <a:lnTo>
+                    <a:pt x="4727086" y="453229"/>
+                  </a:lnTo>
+                  <a:lnTo>
+                    <a:pt x="4655464" y="436548"/>
+                  </a:lnTo>
+                  <a:lnTo>
+                    <a:pt x="4583841" y="419116"/>
+                  </a:lnTo>
+                  <a:lnTo>
+                    <a:pt x="4512219" y="400897"/>
+                  </a:lnTo>
+                  <a:lnTo>
+                    <a:pt x="4440596" y="381858"/>
+                  </a:lnTo>
+                  <a:lnTo>
+                    <a:pt x="4368974" y="361961"/>
+                  </a:lnTo>
+                  <a:lnTo>
+                    <a:pt x="4297351" y="341167"/>
+                  </a:lnTo>
+                  <a:lnTo>
+                    <a:pt x="4225729" y="319437"/>
+                  </a:lnTo>
+                  <a:lnTo>
+                    <a:pt x="4154106" y="296727"/>
+                  </a:lnTo>
+                  <a:lnTo>
+                    <a:pt x="4082483" y="272994"/>
+                  </a:lnTo>
+                  <a:lnTo>
+                    <a:pt x="4010861" y="248192"/>
+                  </a:lnTo>
+                  <a:lnTo>
+                    <a:pt x="3939238" y="222272"/>
+                  </a:lnTo>
+                  <a:lnTo>
+                    <a:pt x="3867616" y="195184"/>
+                  </a:lnTo>
+                  <a:lnTo>
+                    <a:pt x="3795993" y="166875"/>
+                  </a:lnTo>
+                  <a:lnTo>
+                    <a:pt x="3724371" y="137291"/>
+                  </a:lnTo>
+                  <a:lnTo>
+                    <a:pt x="3652748" y="106374"/>
+                  </a:lnTo>
+                  <a:lnTo>
+                    <a:pt x="3581126" y="74064"/>
+                  </a:lnTo>
+                  <a:lnTo>
+                    <a:pt x="3509503" y="40298"/>
+                  </a:lnTo>
+                  <a:lnTo>
+                    <a:pt x="3437881" y="5010"/>
                   </a:lnTo>
                   <a:lnTo>
                     <a:pt x="3366258" y="0"/>
                   </a:lnTo>
                   <a:lnTo>
-                    <a:pt x="3294636" y="8602"/>
-                  </a:lnTo>
-                  <a:lnTo>
-                    <a:pt x="3223013" y="17115"/>
-                  </a:lnTo>
-                  <a:lnTo>
-                    <a:pt x="3151391" y="25539"/>
-                  </a:lnTo>
-                  <a:lnTo>
-                    <a:pt x="3079768" y="33876"/>
-                  </a:lnTo>
-                  <a:lnTo>
-                    <a:pt x="3008146" y="42124"/>
-                  </a:lnTo>
-                  <a:lnTo>
-                    <a:pt x="2936523" y="50287"/>
-                  </a:lnTo>
-                  <a:lnTo>
-                    <a:pt x="2864901" y="58365"/>
-                  </a:lnTo>
-                  <a:lnTo>
-                    <a:pt x="2793278" y="66358"/>
-                  </a:lnTo>
-                  <a:lnTo>
-                    <a:pt x="2721655" y="74267"/>
-                  </a:lnTo>
-                  <a:lnTo>
-                    <a:pt x="2650033" y="82094"/>
-                  </a:lnTo>
-                  <a:lnTo>
-                    <a:pt x="2578410" y="89840"/>
-                  </a:lnTo>
-                  <a:lnTo>
-                    <a:pt x="2506788" y="97504"/>
-                  </a:lnTo>
-                  <a:lnTo>
-                    <a:pt x="2435165" y="105088"/>
-                  </a:lnTo>
-                  <a:lnTo>
-                    <a:pt x="2363543" y="112593"/>
-                  </a:lnTo>
-                  <a:lnTo>
-                    <a:pt x="2291920" y="120019"/>
-                  </a:lnTo>
-                  <a:lnTo>
-                    <a:pt x="2220298" y="127368"/>
-                  </a:lnTo>
-                  <a:lnTo>
-                    <a:pt x="2148675" y="134641"/>
-                  </a:lnTo>
-                  <a:lnTo>
-                    <a:pt x="2077053" y="141837"/>
-                  </a:lnTo>
-                  <a:lnTo>
-                    <a:pt x="2005430" y="148958"/>
-                  </a:lnTo>
-                  <a:lnTo>
-                    <a:pt x="1933808" y="156004"/>
-                  </a:lnTo>
-                  <a:lnTo>
-                    <a:pt x="1862185" y="162977"/>
-                  </a:lnTo>
-                  <a:lnTo>
-                    <a:pt x="1790563" y="169878"/>
-                  </a:lnTo>
-                  <a:lnTo>
-                    <a:pt x="1718940" y="176706"/>
-                  </a:lnTo>
-                  <a:lnTo>
-                    <a:pt x="1647318" y="183462"/>
-                  </a:lnTo>
-                  <a:lnTo>
-                    <a:pt x="1575695" y="190148"/>
-                  </a:lnTo>
-                  <a:lnTo>
-                    <a:pt x="1504073" y="196765"/>
-                  </a:lnTo>
-                  <a:lnTo>
-                    <a:pt x="1432450" y="203312"/>
-                  </a:lnTo>
-                  <a:lnTo>
-                    <a:pt x="1360827" y="209791"/>
-                  </a:lnTo>
-                  <a:lnTo>
-                    <a:pt x="1289205" y="216202"/>
-                  </a:lnTo>
-                  <a:lnTo>
-                    <a:pt x="1217582" y="222546"/>
-                  </a:lnTo>
-                  <a:lnTo>
-                    <a:pt x="1145960" y="228823"/>
-                  </a:lnTo>
-                  <a:lnTo>
-                    <a:pt x="1074337" y="235036"/>
-                  </a:lnTo>
-                  <a:lnTo>
-                    <a:pt x="1002715" y="241183"/>
-                  </a:lnTo>
-                  <a:lnTo>
-                    <a:pt x="931092" y="247266"/>
-                  </a:lnTo>
-                  <a:lnTo>
-                    <a:pt x="859470" y="253286"/>
-                  </a:lnTo>
-                  <a:lnTo>
-                    <a:pt x="787847" y="259242"/>
-                  </a:lnTo>
-                  <a:lnTo>
-                    <a:pt x="716225" y="265137"/>
-                  </a:lnTo>
-                  <a:lnTo>
-                    <a:pt x="644602" y="270969"/>
-                  </a:lnTo>
-                  <a:lnTo>
-                    <a:pt x="572980" y="276741"/>
-                  </a:lnTo>
-                  <a:lnTo>
-                    <a:pt x="501357" y="282453"/>
-                  </a:lnTo>
-                  <a:lnTo>
-                    <a:pt x="429735" y="288105"/>
-                  </a:lnTo>
-                  <a:lnTo>
-                    <a:pt x="358112" y="293698"/>
-                  </a:lnTo>
-                  <a:lnTo>
-                    <a:pt x="286490" y="299232"/>
-                  </a:lnTo>
-                  <a:lnTo>
-                    <a:pt x="214867" y="304709"/>
-                  </a:lnTo>
-                  <a:lnTo>
-                    <a:pt x="143245" y="310128"/>
-                  </a:lnTo>
-                  <a:lnTo>
-                    <a:pt x="71622" y="315491"/>
-                  </a:lnTo>
-                  <a:lnTo>
-                    <a:pt x="0" y="320797"/>
+                    <a:pt x="3294636" y="8590"/>
+                  </a:lnTo>
+                  <a:lnTo>
+                    <a:pt x="3223013" y="17091"/>
+                  </a:lnTo>
+                  <a:lnTo>
+                    <a:pt x="3151391" y="25504"/>
+                  </a:lnTo>
+                  <a:lnTo>
+                    <a:pt x="3079768" y="33828"/>
+                  </a:lnTo>
+                  <a:lnTo>
+                    <a:pt x="3008146" y="42066"/>
+                  </a:lnTo>
+                  <a:lnTo>
+                    <a:pt x="2936523" y="50218"/>
+                  </a:lnTo>
+                  <a:lnTo>
+                    <a:pt x="2864901" y="58285"/>
+                  </a:lnTo>
+                  <a:lnTo>
+                    <a:pt x="2793278" y="66268"/>
+                  </a:lnTo>
+                  <a:lnTo>
+                    <a:pt x="2721655" y="74167"/>
+                  </a:lnTo>
+                  <a:lnTo>
+                    <a:pt x="2650033" y="81984"/>
+                  </a:lnTo>
+                  <a:lnTo>
+                    <a:pt x="2578410" y="89719"/>
+                  </a:lnTo>
+                  <a:lnTo>
+                    <a:pt x="2506788" y="97374"/>
+                  </a:lnTo>
+                  <a:lnTo>
+                    <a:pt x="2435165" y="104949"/>
+                  </a:lnTo>
+                  <a:lnTo>
+                    <a:pt x="2363543" y="112445"/>
+                  </a:lnTo>
+                  <a:lnTo>
+                    <a:pt x="2291920" y="119862"/>
+                  </a:lnTo>
+                  <a:lnTo>
+                    <a:pt x="2220298" y="127203"/>
+                  </a:lnTo>
+                  <a:lnTo>
+                    <a:pt x="2148675" y="134466"/>
+                  </a:lnTo>
+                  <a:lnTo>
+                    <a:pt x="2077053" y="141654"/>
+                  </a:lnTo>
+                  <a:lnTo>
+                    <a:pt x="2005430" y="148767"/>
+                  </a:lnTo>
+                  <a:lnTo>
+                    <a:pt x="1933808" y="155806"/>
+                  </a:lnTo>
+                  <a:lnTo>
+                    <a:pt x="1862185" y="162771"/>
+                  </a:lnTo>
+                  <a:lnTo>
+                    <a:pt x="1790563" y="169663"/>
+                  </a:lnTo>
+                  <a:lnTo>
+                    <a:pt x="1718940" y="176484"/>
+                  </a:lnTo>
+                  <a:lnTo>
+                    <a:pt x="1647318" y="183234"/>
+                  </a:lnTo>
+                  <a:lnTo>
+                    <a:pt x="1575695" y="189913"/>
+                  </a:lnTo>
+                  <a:lnTo>
+                    <a:pt x="1504073" y="196522"/>
+                  </a:lnTo>
+                  <a:lnTo>
+                    <a:pt x="1432450" y="203063"/>
+                  </a:lnTo>
+                  <a:lnTo>
+                    <a:pt x="1360827" y="209535"/>
+                  </a:lnTo>
+                  <a:lnTo>
+                    <a:pt x="1289205" y="215939"/>
+                  </a:lnTo>
+                  <a:lnTo>
+                    <a:pt x="1217582" y="222277"/>
+                  </a:lnTo>
+                  <a:lnTo>
+                    <a:pt x="1145960" y="228549"/>
+                  </a:lnTo>
+                  <a:lnTo>
+                    <a:pt x="1074337" y="234755"/>
+                  </a:lnTo>
+                  <a:lnTo>
+                    <a:pt x="1002715" y="240897"/>
+                  </a:lnTo>
+                  <a:lnTo>
+                    <a:pt x="931092" y="246974"/>
+                  </a:lnTo>
+                  <a:lnTo>
+                    <a:pt x="859470" y="252989"/>
+                  </a:lnTo>
+                  <a:lnTo>
+                    <a:pt x="787847" y="258940"/>
+                  </a:lnTo>
+                  <a:lnTo>
+                    <a:pt x="716225" y="264829"/>
+                  </a:lnTo>
+                  <a:lnTo>
+                    <a:pt x="644602" y="270657"/>
+                  </a:lnTo>
+                  <a:lnTo>
+                    <a:pt x="572980" y="276424"/>
+                  </a:lnTo>
+                  <a:lnTo>
+                    <a:pt x="501357" y="282131"/>
+                  </a:lnTo>
+                  <a:lnTo>
+                    <a:pt x="429735" y="287778"/>
+                  </a:lnTo>
+                  <a:lnTo>
+                    <a:pt x="358112" y="293367"/>
+                  </a:lnTo>
+                  <a:lnTo>
+                    <a:pt x="286490" y="298897"/>
+                  </a:lnTo>
+                  <a:lnTo>
+                    <a:pt x="214867" y="304369"/>
+                  </a:lnTo>
+                  <a:lnTo>
+                    <a:pt x="143245" y="309784"/>
+                  </a:lnTo>
+                  <a:lnTo>
+                    <a:pt x="71622" y="315143"/>
+                  </a:lnTo>
+                  <a:lnTo>
+                    <a:pt x="0" y="320446"/>
                   </a:lnTo>
                 </a:path>
               </a:pathLst>
@@ -4150,312 +4150,312 @@
           </p:nvSpPr>
           <p:spPr>
             <a:xfrm>
-              <a:off x="1172049" y="3715696"/>
-              <a:ext cx="7090630" cy="1489825"/>
+              <a:off x="1172049" y="3709468"/>
+              <a:ext cx="7090630" cy="1497329"/>
             </a:xfrm>
             <a:custGeom>
               <a:avLst/>
               <a:pathLst>
-                <a:path w="7090630" h="1489825">
+                <a:path w="7090630" h="1497329">
                   <a:moveTo>
                     <a:pt x="0" y="0"/>
                   </a:moveTo>
                   <a:lnTo>
-                    <a:pt x="71622" y="30538"/>
-                  </a:lnTo>
-                  <a:lnTo>
-                    <a:pt x="143245" y="60571"/>
-                  </a:lnTo>
-                  <a:lnTo>
-                    <a:pt x="214867" y="90105"/>
-                  </a:lnTo>
-                  <a:lnTo>
-                    <a:pt x="286490" y="119150"/>
-                  </a:lnTo>
-                  <a:lnTo>
-                    <a:pt x="358112" y="147713"/>
-                  </a:lnTo>
-                  <a:lnTo>
-                    <a:pt x="429735" y="175803"/>
-                  </a:lnTo>
-                  <a:lnTo>
-                    <a:pt x="501357" y="203426"/>
-                  </a:lnTo>
-                  <a:lnTo>
-                    <a:pt x="572980" y="230592"/>
-                  </a:lnTo>
-                  <a:lnTo>
-                    <a:pt x="644602" y="257307"/>
-                  </a:lnTo>
-                  <a:lnTo>
-                    <a:pt x="716225" y="283579"/>
-                  </a:lnTo>
-                  <a:lnTo>
-                    <a:pt x="787847" y="309415"/>
-                  </a:lnTo>
-                  <a:lnTo>
-                    <a:pt x="859470" y="334823"/>
-                  </a:lnTo>
-                  <a:lnTo>
-                    <a:pt x="931092" y="359809"/>
-                  </a:lnTo>
-                  <a:lnTo>
-                    <a:pt x="1002715" y="384381"/>
-                  </a:lnTo>
-                  <a:lnTo>
-                    <a:pt x="1074337" y="408546"/>
-                  </a:lnTo>
-                  <a:lnTo>
-                    <a:pt x="1145960" y="432310"/>
-                  </a:lnTo>
-                  <a:lnTo>
-                    <a:pt x="1217582" y="455680"/>
-                  </a:lnTo>
-                  <a:lnTo>
-                    <a:pt x="1289205" y="478662"/>
-                  </a:lnTo>
-                  <a:lnTo>
-                    <a:pt x="1360827" y="501263"/>
-                  </a:lnTo>
-                  <a:lnTo>
-                    <a:pt x="1432450" y="523490"/>
-                  </a:lnTo>
-                  <a:lnTo>
-                    <a:pt x="1504073" y="545347"/>
-                  </a:lnTo>
-                  <a:lnTo>
-                    <a:pt x="1575695" y="566843"/>
-                  </a:lnTo>
-                  <a:lnTo>
-                    <a:pt x="1647318" y="587982"/>
-                  </a:lnTo>
-                  <a:lnTo>
-                    <a:pt x="1718940" y="608770"/>
-                  </a:lnTo>
-                  <a:lnTo>
-                    <a:pt x="1790563" y="629213"/>
-                  </a:lnTo>
-                  <a:lnTo>
-                    <a:pt x="1862185" y="649318"/>
-                  </a:lnTo>
-                  <a:lnTo>
-                    <a:pt x="1933808" y="669089"/>
-                  </a:lnTo>
-                  <a:lnTo>
-                    <a:pt x="2005430" y="688532"/>
-                  </a:lnTo>
-                  <a:lnTo>
-                    <a:pt x="2077053" y="707653"/>
-                  </a:lnTo>
-                  <a:lnTo>
-                    <a:pt x="2148675" y="726457"/>
-                  </a:lnTo>
-                  <a:lnTo>
-                    <a:pt x="2220298" y="744949"/>
-                  </a:lnTo>
-                  <a:lnTo>
-                    <a:pt x="2291920" y="763134"/>
-                  </a:lnTo>
-                  <a:lnTo>
-                    <a:pt x="2363543" y="781018"/>
-                  </a:lnTo>
-                  <a:lnTo>
-                    <a:pt x="2435165" y="798605"/>
-                  </a:lnTo>
-                  <a:lnTo>
-                    <a:pt x="2506788" y="815900"/>
-                  </a:lnTo>
-                  <a:lnTo>
-                    <a:pt x="2578410" y="832909"/>
-                  </a:lnTo>
-                  <a:lnTo>
-                    <a:pt x="2650033" y="849636"/>
-                  </a:lnTo>
-                  <a:lnTo>
-                    <a:pt x="2721655" y="866085"/>
-                  </a:lnTo>
-                  <a:lnTo>
-                    <a:pt x="2793278" y="882261"/>
-                  </a:lnTo>
-                  <a:lnTo>
-                    <a:pt x="2864901" y="898169"/>
-                  </a:lnTo>
-                  <a:lnTo>
-                    <a:pt x="2936523" y="913814"/>
-                  </a:lnTo>
-                  <a:lnTo>
-                    <a:pt x="3008146" y="929199"/>
-                  </a:lnTo>
-                  <a:lnTo>
-                    <a:pt x="3079768" y="944329"/>
-                  </a:lnTo>
-                  <a:lnTo>
-                    <a:pt x="3151391" y="959207"/>
-                  </a:lnTo>
-                  <a:lnTo>
-                    <a:pt x="3223013" y="973840"/>
-                  </a:lnTo>
-                  <a:lnTo>
-                    <a:pt x="3294636" y="988229"/>
-                  </a:lnTo>
-                  <a:lnTo>
-                    <a:pt x="3366258" y="1002380"/>
-                  </a:lnTo>
-                  <a:lnTo>
-                    <a:pt x="3437881" y="1016296"/>
-                  </a:lnTo>
-                  <a:lnTo>
-                    <a:pt x="3509503" y="1029982"/>
-                  </a:lnTo>
-                  <a:lnTo>
-                    <a:pt x="3581126" y="1043440"/>
-                  </a:lnTo>
-                  <a:lnTo>
-                    <a:pt x="3652748" y="1056676"/>
-                  </a:lnTo>
-                  <a:lnTo>
-                    <a:pt x="3724371" y="1069691"/>
-                  </a:lnTo>
-                  <a:lnTo>
-                    <a:pt x="3795993" y="1082491"/>
-                  </a:lnTo>
-                  <a:lnTo>
-                    <a:pt x="3867616" y="1095079"/>
-                  </a:lnTo>
-                  <a:lnTo>
-                    <a:pt x="3939238" y="1107458"/>
-                  </a:lnTo>
-                  <a:lnTo>
-                    <a:pt x="4010861" y="1119632"/>
-                  </a:lnTo>
-                  <a:lnTo>
-                    <a:pt x="4082483" y="1131603"/>
-                  </a:lnTo>
-                  <a:lnTo>
-                    <a:pt x="4154106" y="1143377"/>
-                  </a:lnTo>
-                  <a:lnTo>
-                    <a:pt x="4225729" y="1154955"/>
-                  </a:lnTo>
-                  <a:lnTo>
-                    <a:pt x="4297351" y="1166341"/>
-                  </a:lnTo>
-                  <a:lnTo>
-                    <a:pt x="4368974" y="1177538"/>
-                  </a:lnTo>
-                  <a:lnTo>
-                    <a:pt x="4440596" y="1188550"/>
-                  </a:lnTo>
-                  <a:lnTo>
-                    <a:pt x="4512219" y="1199378"/>
-                  </a:lnTo>
-                  <a:lnTo>
-                    <a:pt x="4583841" y="1210028"/>
-                  </a:lnTo>
-                  <a:lnTo>
-                    <a:pt x="4655464" y="1220501"/>
-                  </a:lnTo>
-                  <a:lnTo>
-                    <a:pt x="4727086" y="1230800"/>
-                  </a:lnTo>
-                  <a:lnTo>
-                    <a:pt x="4798709" y="1240928"/>
-                  </a:lnTo>
-                  <a:lnTo>
-                    <a:pt x="4870331" y="1250888"/>
-                  </a:lnTo>
-                  <a:lnTo>
-                    <a:pt x="4941954" y="1260683"/>
-                  </a:lnTo>
-                  <a:lnTo>
-                    <a:pt x="5013576" y="1270316"/>
-                  </a:lnTo>
-                  <a:lnTo>
-                    <a:pt x="5085199" y="1279789"/>
-                  </a:lnTo>
-                  <a:lnTo>
-                    <a:pt x="5156821" y="1289105"/>
-                  </a:lnTo>
-                  <a:lnTo>
-                    <a:pt x="5228444" y="1298266"/>
-                  </a:lnTo>
-                  <a:lnTo>
-                    <a:pt x="5300066" y="1307276"/>
-                  </a:lnTo>
-                  <a:lnTo>
-                    <a:pt x="5371689" y="1316136"/>
-                  </a:lnTo>
-                  <a:lnTo>
-                    <a:pt x="5443311" y="1324849"/>
-                  </a:lnTo>
-                  <a:lnTo>
-                    <a:pt x="5514934" y="1333418"/>
-                  </a:lnTo>
-                  <a:lnTo>
-                    <a:pt x="5586557" y="1341844"/>
-                  </a:lnTo>
-                  <a:lnTo>
-                    <a:pt x="5658179" y="1350131"/>
-                  </a:lnTo>
-                  <a:lnTo>
-                    <a:pt x="5729802" y="1358280"/>
-                  </a:lnTo>
-                  <a:lnTo>
-                    <a:pt x="5801424" y="1366295"/>
-                  </a:lnTo>
-                  <a:lnTo>
-                    <a:pt x="5873047" y="1374176"/>
-                  </a:lnTo>
-                  <a:lnTo>
-                    <a:pt x="5944669" y="1381926"/>
-                  </a:lnTo>
-                  <a:lnTo>
-                    <a:pt x="6016292" y="1389549"/>
-                  </a:lnTo>
-                  <a:lnTo>
-                    <a:pt x="6087914" y="1397044"/>
-                  </a:lnTo>
-                  <a:lnTo>
-                    <a:pt x="6159537" y="1404416"/>
-                  </a:lnTo>
-                  <a:lnTo>
-                    <a:pt x="6231159" y="1411665"/>
-                  </a:lnTo>
-                  <a:lnTo>
-                    <a:pt x="6302782" y="1418794"/>
-                  </a:lnTo>
-                  <a:lnTo>
-                    <a:pt x="6374404" y="1425804"/>
-                  </a:lnTo>
-                  <a:lnTo>
-                    <a:pt x="6446027" y="1432699"/>
-                  </a:lnTo>
-                  <a:lnTo>
-                    <a:pt x="6517649" y="1439479"/>
-                  </a:lnTo>
-                  <a:lnTo>
-                    <a:pt x="6589272" y="1446147"/>
-                  </a:lnTo>
-                  <a:lnTo>
-                    <a:pt x="6660894" y="1452704"/>
-                  </a:lnTo>
-                  <a:lnTo>
-                    <a:pt x="6732517" y="1459152"/>
-                  </a:lnTo>
-                  <a:lnTo>
-                    <a:pt x="6804139" y="1465494"/>
-                  </a:lnTo>
-                  <a:lnTo>
-                    <a:pt x="6875762" y="1471730"/>
-                  </a:lnTo>
-                  <a:lnTo>
-                    <a:pt x="6947385" y="1477863"/>
-                  </a:lnTo>
-                  <a:lnTo>
-                    <a:pt x="7019007" y="1483894"/>
-                  </a:lnTo>
-                  <a:lnTo>
-                    <a:pt x="7090630" y="1489825"/>
+                    <a:pt x="71622" y="30770"/>
+                  </a:lnTo>
+                  <a:lnTo>
+                    <a:pt x="143245" y="61029"/>
+                  </a:lnTo>
+                  <a:lnTo>
+                    <a:pt x="214867" y="90783"/>
+                  </a:lnTo>
+                  <a:lnTo>
+                    <a:pt x="286490" y="120042"/>
+                  </a:lnTo>
+                  <a:lnTo>
+                    <a:pt x="358112" y="148814"/>
+                  </a:lnTo>
+                  <a:lnTo>
+                    <a:pt x="429735" y="177107"/>
+                  </a:lnTo>
+                  <a:lnTo>
+                    <a:pt x="501357" y="204929"/>
+                  </a:lnTo>
+                  <a:lnTo>
+                    <a:pt x="572980" y="232287"/>
+                  </a:lnTo>
+                  <a:lnTo>
+                    <a:pt x="644602" y="259189"/>
+                  </a:lnTo>
+                  <a:lnTo>
+                    <a:pt x="716225" y="285644"/>
+                  </a:lnTo>
+                  <a:lnTo>
+                    <a:pt x="787847" y="311658"/>
+                  </a:lnTo>
+                  <a:lnTo>
+                    <a:pt x="859470" y="337239"/>
+                  </a:lnTo>
+                  <a:lnTo>
+                    <a:pt x="931092" y="362394"/>
+                  </a:lnTo>
+                  <a:lnTo>
+                    <a:pt x="1002715" y="387130"/>
+                  </a:lnTo>
+                  <a:lnTo>
+                    <a:pt x="1074337" y="411454"/>
+                  </a:lnTo>
+                  <a:lnTo>
+                    <a:pt x="1145960" y="435373"/>
+                  </a:lnTo>
+                  <a:lnTo>
+                    <a:pt x="1217582" y="458893"/>
+                  </a:lnTo>
+                  <a:lnTo>
+                    <a:pt x="1289205" y="482022"/>
+                  </a:lnTo>
+                  <a:lnTo>
+                    <a:pt x="1360827" y="504766"/>
+                  </a:lnTo>
+                  <a:lnTo>
+                    <a:pt x="1432450" y="527131"/>
+                  </a:lnTo>
+                  <a:lnTo>
+                    <a:pt x="1504073" y="549124"/>
+                  </a:lnTo>
+                  <a:lnTo>
+                    <a:pt x="1575695" y="570750"/>
+                  </a:lnTo>
+                  <a:lnTo>
+                    <a:pt x="1647318" y="592017"/>
+                  </a:lnTo>
+                  <a:lnTo>
+                    <a:pt x="1718940" y="612929"/>
+                  </a:lnTo>
+                  <a:lnTo>
+                    <a:pt x="1790563" y="633492"/>
+                  </a:lnTo>
+                  <a:lnTo>
+                    <a:pt x="1862185" y="653714"/>
+                  </a:lnTo>
+                  <a:lnTo>
+                    <a:pt x="1933808" y="673599"/>
+                  </a:lnTo>
+                  <a:lnTo>
+                    <a:pt x="2005430" y="693152"/>
+                  </a:lnTo>
+                  <a:lnTo>
+                    <a:pt x="2077053" y="712380"/>
+                  </a:lnTo>
+                  <a:lnTo>
+                    <a:pt x="2148675" y="731288"/>
+                  </a:lnTo>
+                  <a:lnTo>
+                    <a:pt x="2220298" y="749880"/>
+                  </a:lnTo>
+                  <a:lnTo>
+                    <a:pt x="2291920" y="768164"/>
+                  </a:lnTo>
+                  <a:lnTo>
+                    <a:pt x="2363543" y="786142"/>
+                  </a:lnTo>
+                  <a:lnTo>
+                    <a:pt x="2435165" y="803822"/>
+                  </a:lnTo>
+                  <a:lnTo>
+                    <a:pt x="2506788" y="821207"/>
+                  </a:lnTo>
+                  <a:lnTo>
+                    <a:pt x="2578410" y="838302"/>
+                  </a:lnTo>
+                  <a:lnTo>
+                    <a:pt x="2650033" y="855113"/>
+                  </a:lnTo>
+                  <a:lnTo>
+                    <a:pt x="2721655" y="871644"/>
+                  </a:lnTo>
+                  <a:lnTo>
+                    <a:pt x="2793278" y="887899"/>
+                  </a:lnTo>
+                  <a:lnTo>
+                    <a:pt x="2864901" y="903884"/>
+                  </a:lnTo>
+                  <a:lnTo>
+                    <a:pt x="2936523" y="919603"/>
+                  </a:lnTo>
+                  <a:lnTo>
+                    <a:pt x="3008146" y="935059"/>
+                  </a:lnTo>
+                  <a:lnTo>
+                    <a:pt x="3079768" y="950259"/>
+                  </a:lnTo>
+                  <a:lnTo>
+                    <a:pt x="3151391" y="965205"/>
+                  </a:lnTo>
+                  <a:lnTo>
+                    <a:pt x="3223013" y="979903"/>
+                  </a:lnTo>
+                  <a:lnTo>
+                    <a:pt x="3294636" y="994355"/>
+                  </a:lnTo>
+                  <a:lnTo>
+                    <a:pt x="3366258" y="1008567"/>
+                  </a:lnTo>
+                  <a:lnTo>
+                    <a:pt x="3437881" y="1022543"/>
+                  </a:lnTo>
+                  <a:lnTo>
+                    <a:pt x="3509503" y="1036285"/>
+                  </a:lnTo>
+                  <a:lnTo>
+                    <a:pt x="3581126" y="1049799"/>
+                  </a:lnTo>
+                  <a:lnTo>
+                    <a:pt x="3652748" y="1063088"/>
+                  </a:lnTo>
+                  <a:lnTo>
+                    <a:pt x="3724371" y="1076155"/>
+                  </a:lnTo>
+                  <a:lnTo>
+                    <a:pt x="3795993" y="1089005"/>
+                  </a:lnTo>
+                  <a:lnTo>
+                    <a:pt x="3867616" y="1101641"/>
+                  </a:lnTo>
+                  <a:lnTo>
+                    <a:pt x="3939238" y="1114066"/>
+                  </a:lnTo>
+                  <a:lnTo>
+                    <a:pt x="4010861" y="1126284"/>
+                  </a:lnTo>
+                  <a:lnTo>
+                    <a:pt x="4082483" y="1138299"/>
+                  </a:lnTo>
+                  <a:lnTo>
+                    <a:pt x="4154106" y="1150114"/>
+                  </a:lnTo>
+                  <a:lnTo>
+                    <a:pt x="4225729" y="1161733"/>
+                  </a:lnTo>
+                  <a:lnTo>
+                    <a:pt x="4297351" y="1173157"/>
+                  </a:lnTo>
+                  <a:lnTo>
+                    <a:pt x="4368974" y="1184392"/>
+                  </a:lnTo>
+                  <a:lnTo>
+                    <a:pt x="4440596" y="1195439"/>
+                  </a:lnTo>
+                  <a:lnTo>
+                    <a:pt x="4512219" y="1206302"/>
+                  </a:lnTo>
+                  <a:lnTo>
+                    <a:pt x="4583841" y="1216985"/>
+                  </a:lnTo>
+                  <a:lnTo>
+                    <a:pt x="4655464" y="1227489"/>
+                  </a:lnTo>
+                  <a:lnTo>
+                    <a:pt x="4727086" y="1237819"/>
+                  </a:lnTo>
+                  <a:lnTo>
+                    <a:pt x="4798709" y="1247977"/>
+                  </a:lnTo>
+                  <a:lnTo>
+                    <a:pt x="4870331" y="1257965"/>
+                  </a:lnTo>
+                  <a:lnTo>
+                    <a:pt x="4941954" y="1267787"/>
+                  </a:lnTo>
+                  <a:lnTo>
+                    <a:pt x="5013576" y="1277446"/>
+                  </a:lnTo>
+                  <a:lnTo>
+                    <a:pt x="5085199" y="1286944"/>
+                  </a:lnTo>
+                  <a:lnTo>
+                    <a:pt x="5156821" y="1296283"/>
+                  </a:lnTo>
+                  <a:lnTo>
+                    <a:pt x="5228444" y="1305467"/>
+                  </a:lnTo>
+                  <a:lnTo>
+                    <a:pt x="5300066" y="1314498"/>
+                  </a:lnTo>
+                  <a:lnTo>
+                    <a:pt x="5371689" y="1323379"/>
+                  </a:lnTo>
+                  <a:lnTo>
+                    <a:pt x="5443311" y="1332112"/>
+                  </a:lnTo>
+                  <a:lnTo>
+                    <a:pt x="5514934" y="1340699"/>
+                  </a:lnTo>
+                  <a:lnTo>
+                    <a:pt x="5586557" y="1349144"/>
+                  </a:lnTo>
+                  <a:lnTo>
+                    <a:pt x="5658179" y="1357447"/>
+                  </a:lnTo>
+                  <a:lnTo>
+                    <a:pt x="5729802" y="1365613"/>
+                  </a:lnTo>
+                  <a:lnTo>
+                    <a:pt x="5801424" y="1373642"/>
+                  </a:lnTo>
+                  <a:lnTo>
+                    <a:pt x="5873047" y="1381538"/>
+                  </a:lnTo>
+                  <a:lnTo>
+                    <a:pt x="5944669" y="1389302"/>
+                  </a:lnTo>
+                  <a:lnTo>
+                    <a:pt x="6016292" y="1396937"/>
+                  </a:lnTo>
+                  <a:lnTo>
+                    <a:pt x="6087914" y="1404445"/>
+                  </a:lnTo>
+                  <a:lnTo>
+                    <a:pt x="6159537" y="1411828"/>
+                  </a:lnTo>
+                  <a:lnTo>
+                    <a:pt x="6231159" y="1419088"/>
+                  </a:lnTo>
+                  <a:lnTo>
+                    <a:pt x="6302782" y="1426227"/>
+                  </a:lnTo>
+                  <a:lnTo>
+                    <a:pt x="6374404" y="1433247"/>
+                  </a:lnTo>
+                  <a:lnTo>
+                    <a:pt x="6446027" y="1440150"/>
+                  </a:lnTo>
+                  <a:lnTo>
+                    <a:pt x="6517649" y="1446938"/>
+                  </a:lnTo>
+                  <a:lnTo>
+                    <a:pt x="6589272" y="1453614"/>
+                  </a:lnTo>
+                  <a:lnTo>
+                    <a:pt x="6660894" y="1460178"/>
+                  </a:lnTo>
+                  <a:lnTo>
+                    <a:pt x="6732517" y="1466632"/>
+                  </a:lnTo>
+                  <a:lnTo>
+                    <a:pt x="6804139" y="1472980"/>
+                  </a:lnTo>
+                  <a:lnTo>
+                    <a:pt x="6875762" y="1479221"/>
+                  </a:lnTo>
+                  <a:lnTo>
+                    <a:pt x="6947385" y="1485359"/>
+                  </a:lnTo>
+                  <a:lnTo>
+                    <a:pt x="7019007" y="1491394"/>
+                  </a:lnTo>
+                  <a:lnTo>
+                    <a:pt x="7090630" y="1497329"/>
                   </a:lnTo>
                 </a:path>
               </a:pathLst>
@@ -5063,7 +5063,7 @@
                   <a:latin typeface="Helvetica"/>
                   <a:cs typeface="Helvetica"/>
                 </a:rPr>
-                <a:t>subHR per 10 % decline: 1.22 (0.88-1.70), p = 0.229  |  per IQR decline (Δ = 29.3 %): 1.80 (0.69-4.69)  |  IQR: [-14.6, 14.7] %</a:t>
+                <a:t>subHR per 10 % decline: 1.22 (0.88-1.70), p = 0.228  |  per IQR decline (Δ = 29.3 %): 1.81 (0.69-4.71)  |  IQR: [-14.6, 14.7] %</a:t>
               </a:r>
             </a:p>
           </p:txBody>
